--- a/documents/manual/cashier-flow.pptx
+++ b/documents/manual/cashier-flow.pptx
@@ -11,8 +11,8 @@
   <p:notesMasterIdLst>
     <p:notesMasterId r:id="rId4"/>
   </p:notesMasterIdLst>
-  <p:sldSz cx="10689336" cy="7562088"/>
-  <p:notesSz cx="7562088" cy="10689336"/>
+  <p:sldSz cx="7562088" cy="10689336"/>
+  <p:notesSz cx="10689336" cy="7562088"/>
   <p:defaultTextStyle>
     <a:lvl1pPr marL="0" algn="l" defTabSz="914400" rtl="0" eaLnBrk="1" latinLnBrk="0" hangingPunct="1">
       <a:defRPr sz="1800" kern="1200">
@@ -697,8 +697,8 @@
         </p:nvSpPr>
         <p:spPr>
           <a:xfrm>
-            <a:off x="457200" y="320040"/>
-            <a:ext cx="7498080" cy="566928"/>
+            <a:off x="457200" y="365760"/>
+            <a:ext cx="4389120" cy="548640"/>
           </a:xfrm>
           <a:prstGeom prst="rect">
             <a:avLst/>
@@ -711,7 +711,7 @@
           <a:lstStyle>
             <a:lvl1pPr algn="l" indent="0" marL="0">
               <a:buNone/>
-              <a:defRPr lang="ja-JP" altLang="en-US" sz="2800" b="1" dirty="0">
+              <a:defRPr lang="ja-JP" altLang="en-US" sz="2600" b="1" dirty="0">
                 <a:solidFill>
                   <a:schemeClr val="tx2"/>
                 </a:solidFill>
@@ -722,7 +722,7 @@
             <a:pPr algn="l" indent="0" marL="0">
               <a:buNone/>
             </a:pPr>
-            <a:endParaRPr lang="ja-JP" sz="2800" dirty="0"/>
+            <a:endParaRPr lang="ja-JP" sz="2600" dirty="0"/>
           </a:p>
         </p:txBody>
       </p:sp>
@@ -734,8 +734,8 @@
         </p:nvSpPr>
         <p:spPr>
           <a:xfrm>
-            <a:off x="6574536" y="384048"/>
-            <a:ext cx="3657600" cy="274320"/>
+            <a:off x="4361688" y="457200"/>
+            <a:ext cx="2743200" cy="274320"/>
           </a:xfrm>
           <a:prstGeom prst="rect">
             <a:avLst/>
@@ -751,14 +751,14 @@
               <a:buNone/>
             </a:pPr>
             <a:r>
-              <a:rPr lang="ja-JP" altLang="en-US" sz="1100" dirty="0">
+              <a:rPr lang="ja-JP" altLang="en-US" sz="1000" dirty="0">
                 <a:solidFill>
                   <a:srgbClr val="8A8079"/>
                 </a:solidFill>
               </a:rPr>
               <a:t>珈琲・俺POS　レジ係向け早見表</a:t>
             </a:r>
-            <a:endParaRPr lang="ja-JP" sz="1100" dirty="0"/>
+            <a:endParaRPr lang="ja-JP" sz="1000" dirty="0"/>
           </a:p>
         </p:txBody>
       </p:sp>
@@ -774,7 +774,7 @@
         </p:nvSpPr>
         <p:spPr>
           <a:xfrm>
-            <a:off x="9317736" y="7178040"/>
+            <a:off x="6190488" y="10259568"/>
             <a:ext cx="914400" cy="228600"/>
           </a:xfrm>
           <a:prstGeom prst="rect">
@@ -844,7 +844,7 @@
         </p:nvSpPr>
         <p:spPr>
           <a:xfrm>
-            <a:off x="9317736" y="7178040"/>
+            <a:off x="6190488" y="10259568"/>
             <a:ext cx="914400" cy="228600"/>
           </a:xfrm>
           <a:prstGeom prst="rect">
@@ -1165,8 +1165,8 @@
         </p:nvSpPr>
         <p:spPr>
           <a:xfrm>
-            <a:off x="457200" y="320040"/>
-            <a:ext cx="7498080" cy="566928"/>
+            <a:off x="457200" y="365760"/>
+            <a:ext cx="4389120" cy="548640"/>
           </a:xfrm>
           <a:prstGeom prst="rect">
             <a:avLst/>
@@ -1182,14 +1182,14 @@
               <a:buNone/>
             </a:pPr>
             <a:r>
-              <a:rPr lang="ja-JP" altLang="en-US" sz="2800" b="1" dirty="0">
+              <a:rPr lang="ja-JP" altLang="en-US" sz="2600" b="1" dirty="0">
                 <a:solidFill>
                   <a:schemeClr val="tx2"/>
                 </a:solidFill>
               </a:rPr>
               <a:t>注文を受ける流れ</a:t>
             </a:r>
-            <a:endParaRPr lang="ja-JP" sz="2800" dirty="0"/>
+            <a:endParaRPr lang="ja-JP" sz="2600" dirty="0"/>
           </a:p>
         </p:txBody>
       </p:sp>
@@ -1201,8 +1201,8 @@
         </p:nvSpPr>
         <p:spPr>
           <a:xfrm>
-            <a:off x="457200" y="914400"/>
-            <a:ext cx="9144000" cy="274320"/>
+            <a:off x="3813048" y="713232"/>
+            <a:ext cx="3291840" cy="219456"/>
           </a:xfrm>
           <a:prstGeom prst="rect">
             <a:avLst/>
@@ -1214,40 +1214,29 @@
           <a:bodyPr wrap="square" lIns="0" tIns="0" rIns="0" bIns="0" rtlCol="0" anchor="ctr"/>
           <a:lstStyle/>
           <a:p>
-            <a:pPr indent="0" marL="0">
+            <a:pPr algn="r" indent="0" marL="0">
               <a:buNone/>
             </a:pPr>
             <a:r>
-              <a:rPr lang="ja-JP" altLang="en-US" sz="1200" dirty="0">
-                <a:solidFill>
-                  <a:srgbClr val="57534E"/>
-                </a:solidFill>
-              </a:rPr>
-              <a:t>キーボードだけで最後まで打てます。</a:t>
-            </a:r>
-            <a:r>
-              <a:rPr lang="ja-JP" altLang="en-US" sz="1200" b="1" dirty="0">
+              <a:rPr lang="ja-JP" altLang="en-US" sz="950" b="1" dirty="0">
                 <a:solidFill>
                   <a:srgbClr val="57534E"/>
                 </a:solidFill>
                 <a:highlight>
                   <a:srgbClr val="E7E5E4"/>
                 </a:highlight>
-                <a:latin typeface="Yu Gothic" pitchFamily="34" charset="0"/>
-                <a:ea typeface="Yu Gothic" pitchFamily="34" charset="-122"/>
-                <a:cs typeface="Yu Gothic" pitchFamily="34" charset="-120"/>
               </a:rPr>
               <a:t> Enter </a:t>
             </a:r>
             <a:r>
-              <a:rPr lang="ja-JP" altLang="en-US" sz="1200" dirty="0">
+              <a:rPr lang="ja-JP" altLang="en-US" sz="950" dirty="0">
                 <a:solidFill>
                   <a:srgbClr val="57534E"/>
                 </a:solidFill>
               </a:rPr>
-              <a:t> などはキーの名前です。</a:t>
-            </a:r>
-            <a:endParaRPr lang="ja-JP" sz="1200" dirty="0"/>
+              <a:t> のような灰色の文字はキーボードのキー</a:t>
+            </a:r>
+            <a:endParaRPr lang="ja-JP" sz="950" dirty="0"/>
           </a:p>
         </p:txBody>
       </p:sp>
@@ -1259,12 +1248,12 @@
         </p:nvSpPr>
         <p:spPr>
           <a:xfrm>
-            <a:off x="457200" y="1298448"/>
-            <a:ext cx="2923032" cy="1783080"/>
+            <a:off x="457200" y="1051560"/>
+            <a:ext cx="6647688" cy="1261872"/>
           </a:xfrm>
           <a:prstGeom prst="roundRect">
             <a:avLst>
-              <a:gd name="adj" fmla="val 6154"/>
+              <a:gd name="adj" fmla="val 7246"/>
             </a:avLst>
           </a:prstGeom>
           <a:solidFill>
@@ -1286,8 +1275,8 @@
         </p:nvSpPr>
         <p:spPr>
           <a:xfrm>
-            <a:off x="640080" y="1481328"/>
-            <a:ext cx="420624" cy="420624"/>
+            <a:off x="603504" y="1197864"/>
+            <a:ext cx="457200" cy="457200"/>
           </a:xfrm>
           <a:prstGeom prst="ellipse">
             <a:avLst/>
@@ -1311,8 +1300,8 @@
         </p:nvSpPr>
         <p:spPr>
           <a:xfrm>
-            <a:off x="640080" y="1481328"/>
-            <a:ext cx="420624" cy="420624"/>
+            <a:off x="603504" y="1197864"/>
+            <a:ext cx="457200" cy="457200"/>
           </a:xfrm>
           <a:prstGeom prst="rect">
             <a:avLst/>
@@ -1347,8 +1336,8 @@
         </p:nvSpPr>
         <p:spPr>
           <a:xfrm>
-            <a:off x="1170432" y="1481328"/>
-            <a:ext cx="2054352" cy="420624"/>
+            <a:off x="1188720" y="1197864"/>
+            <a:ext cx="3017520" cy="457200"/>
           </a:xfrm>
           <a:prstGeom prst="rect">
             <a:avLst/>
@@ -1364,14 +1353,14 @@
               <a:buNone/>
             </a:pPr>
             <a:r>
-              <a:rPr lang="ja-JP" altLang="en-US" sz="1700" b="1" dirty="0">
+              <a:rPr lang="ja-JP" altLang="en-US" sz="1600" b="1" dirty="0">
                 <a:solidFill>
                   <a:schemeClr val="tx1"/>
                 </a:solidFill>
               </a:rPr>
               <a:t>商品を入れる</a:t>
             </a:r>
-            <a:endParaRPr lang="ja-JP" sz="1700" dirty="0"/>
+            <a:endParaRPr lang="ja-JP" sz="1600" dirty="0"/>
           </a:p>
         </p:txBody>
       </p:sp>
@@ -1383,8 +1372,8 @@
         </p:nvSpPr>
         <p:spPr>
           <a:xfrm>
-            <a:off x="640080" y="2029968"/>
-            <a:ext cx="2557272" cy="914400"/>
+            <a:off x="1188720" y="1673352"/>
+            <a:ext cx="3017520" cy="566928"/>
           </a:xfrm>
           <a:prstGeom prst="rect">
             <a:avLst/>
@@ -1396,15 +1385,15 @@
           <a:bodyPr wrap="square" lIns="0" tIns="0" rIns="0" bIns="0" rtlCol="0" anchor="t"/>
           <a:lstStyle/>
           <a:p>
-            <a:pPr marL="177800" indent="-177800">
+            <a:pPr marL="152400" indent="-152400">
               <a:spcAft>
-                <a:spcPts val="400"/>
+                <a:spcPts val="300"/>
               </a:spcAft>
               <a:buSzPct val="100000"/>
               <a:buChar char="•"/>
             </a:pPr>
             <a:r>
-              <a:rPr lang="ja-JP" altLang="en-US" sz="1300" dirty="0">
+              <a:rPr lang="ja-JP" altLang="en-US" sz="1150" dirty="0">
                 <a:solidFill>
                   <a:schemeClr val="tx1"/>
                 </a:solidFill>
@@ -1412,841 +1401,114 @@
               <a:t>商品キー（</a:t>
             </a:r>
             <a:r>
-              <a:rPr lang="ja-JP" altLang="en-US" sz="1300" b="1" dirty="0">
+              <a:rPr lang="ja-JP" altLang="en-US" sz="1150" b="1" dirty="0">
                 <a:solidFill>
                   <a:schemeClr val="tx1"/>
                 </a:solidFill>
                 <a:highlight>
                   <a:srgbClr val="E7E5E4"/>
                 </a:highlight>
-                <a:latin typeface="Yu Gothic" pitchFamily="34" charset="0"/>
-                <a:ea typeface="Yu Gothic" pitchFamily="34" charset="-122"/>
-                <a:cs typeface="Yu Gothic" pitchFamily="34" charset="-120"/>
               </a:rPr>
               <a:t> q </a:t>
             </a:r>
             <a:r>
-              <a:rPr lang="ja-JP" altLang="en-US" sz="1300" dirty="0">
+              <a:rPr lang="ja-JP" altLang="en-US" sz="1150" dirty="0">
                 <a:solidFill>
                   <a:schemeClr val="tx1"/>
                 </a:solidFill>
               </a:rPr>
               <a:t> など）かボタン</a:t>
             </a:r>
-            <a:endParaRPr lang="ja-JP" sz="1300" dirty="0"/>
-          </a:p>
-          <a:p>
-            <a:pPr marL="177800" indent="-177800">
+            <a:endParaRPr lang="ja-JP" sz="1150" dirty="0"/>
+          </a:p>
+          <a:p>
+            <a:pPr marL="152400" indent="-152400">
               <a:spcAft>
-                <a:spcPts val="400"/>
+                <a:spcPts val="300"/>
               </a:spcAft>
               <a:buSzPct val="100000"/>
               <a:buChar char="•"/>
             </a:pPr>
             <a:r>
-              <a:rPr lang="ja-JP" altLang="en-US" sz="1300" dirty="0">
-                <a:solidFill>
-                  <a:schemeClr val="tx1"/>
-                </a:solidFill>
-              </a:rPr>
-              <a:t>指名は </a:t>
-            </a:r>
-            <a:r>
-              <a:rPr lang="ja-JP" altLang="en-US" sz="1300" b="1" dirty="0">
+              <a:rPr lang="ja-JP" altLang="en-US" sz="1150" dirty="0">
+                <a:solidFill>
+                  <a:schemeClr val="tx1"/>
+                </a:solidFill>
+              </a:rPr>
+              <a:t>間違えたら </a:t>
+            </a:r>
+            <a:r>
+              <a:rPr lang="ja-JP" altLang="en-US" sz="1150" b="1" dirty="0">
                 <a:solidFill>
                   <a:schemeClr val="tx1"/>
                 </a:solidFill>
                 <a:highlight>
                   <a:srgbClr val="E7E5E4"/>
                 </a:highlight>
-                <a:latin typeface="Yu Gothic" pitchFamily="34" charset="0"/>
-                <a:ea typeface="Yu Gothic" pitchFamily="34" charset="-122"/>
-                <a:cs typeface="Yu Gothic" pitchFamily="34" charset="-120"/>
-              </a:rPr>
-              <a:t> 1 </a:t>
-            </a:r>
-            <a:r>
-              <a:rPr lang="ja-JP" altLang="en-US" sz="1300" dirty="0">
-                <a:solidFill>
-                  <a:schemeClr val="tx1"/>
-                </a:solidFill>
-              </a:rPr>
-              <a:t>〜</a:t>
-            </a:r>
-            <a:r>
-              <a:rPr lang="ja-JP" altLang="en-US" sz="1300" b="1" dirty="0">
+              </a:rPr>
+              <a:t> Backspace </a:t>
+            </a:r>
+            <a:endParaRPr lang="ja-JP" sz="1150" dirty="0"/>
+          </a:p>
+          <a:p>
+            <a:pPr marL="152400" indent="-152400">
+              <a:spcAft>
+                <a:spcPts val="300"/>
+              </a:spcAft>
+              <a:buSzPct val="100000"/>
+              <a:buChar char="•"/>
+            </a:pPr>
+            <a:r>
+              <a:rPr lang="ja-JP" altLang="en-US" sz="1150" dirty="0">
+                <a:solidFill>
+                  <a:schemeClr val="tx1"/>
+                </a:solidFill>
+              </a:rPr>
+              <a:t>全部やめるなら </a:t>
+            </a:r>
+            <a:r>
+              <a:rPr lang="ja-JP" altLang="en-US" sz="1150" b="1" dirty="0">
                 <a:solidFill>
                   <a:schemeClr val="tx1"/>
                 </a:solidFill>
                 <a:highlight>
                   <a:srgbClr val="E7E5E4"/>
                 </a:highlight>
-                <a:latin typeface="Yu Gothic" pitchFamily="34" charset="0"/>
-                <a:ea typeface="Yu Gothic" pitchFamily="34" charset="-122"/>
-                <a:cs typeface="Yu Gothic" pitchFamily="34" charset="-120"/>
-              </a:rPr>
-              <a:t> 6 </a:t>
-            </a:r>
-            <a:r>
-              <a:rPr lang="ja-JP" altLang="en-US" sz="1300" dirty="0">
-                <a:solidFill>
-                  <a:schemeClr val="tx1"/>
-                </a:solidFill>
-              </a:rPr>
-              <a:t>（</a:t>
-            </a:r>
-            <a:r>
-              <a:rPr lang="ja-JP" altLang="en-US" sz="1300" b="1" dirty="0">
-                <a:solidFill>
-                  <a:schemeClr val="tx1"/>
-                </a:solidFill>
-                <a:highlight>
-                  <a:srgbClr val="E7E5E4"/>
-                </a:highlight>
-                <a:latin typeface="Yu Gothic" pitchFamily="34" charset="0"/>
-                <a:ea typeface="Yu Gothic" pitchFamily="34" charset="-122"/>
-                <a:cs typeface="Yu Gothic" pitchFamily="34" charset="-120"/>
-              </a:rPr>
-              <a:t> 0 </a:t>
-            </a:r>
-            <a:r>
-              <a:rPr lang="ja-JP" altLang="en-US" sz="1300" dirty="0">
-                <a:solidFill>
-                  <a:schemeClr val="tx1"/>
-                </a:solidFill>
-              </a:rPr>
-              <a:t> で外す）</a:t>
-            </a:r>
-            <a:endParaRPr lang="ja-JP" sz="1300" dirty="0"/>
-          </a:p>
-          <a:p>
-            <a:pPr marL="177800" indent="-177800">
-              <a:spcAft>
-                <a:spcPts val="400"/>
-              </a:spcAft>
-              <a:buSzPct val="100000"/>
-              <a:buChar char="•"/>
-            </a:pPr>
-            <a:r>
-              <a:rPr lang="ja-JP" altLang="en-US" sz="1300" dirty="0">
-                <a:solidFill>
-                  <a:schemeClr val="tx1"/>
-                </a:solidFill>
-              </a:rPr>
-              <a:t>間違えたら </a:t>
-            </a:r>
-            <a:r>
-              <a:rPr lang="ja-JP" altLang="en-US" sz="1300" b="1" dirty="0">
-                <a:solidFill>
-                  <a:schemeClr val="tx1"/>
-                </a:solidFill>
-                <a:highlight>
-                  <a:srgbClr val="E7E5E4"/>
-                </a:highlight>
-                <a:latin typeface="Yu Gothic" pitchFamily="34" charset="0"/>
-                <a:ea typeface="Yu Gothic" pitchFamily="34" charset="-122"/>
-                <a:cs typeface="Yu Gothic" pitchFamily="34" charset="-120"/>
-              </a:rPr>
-              <a:t> Backspace </a:t>
-            </a:r>
-            <a:endParaRPr lang="ja-JP" sz="1300" dirty="0"/>
-          </a:p>
-        </p:txBody>
-      </p:sp>
-      <p:sp>
-        <p:nvSpPr>
-          <p:cNvPr id="9" name="arrow1"/>
+              </a:rPr>
+              <a:t> Esc </a:t>
+            </a:r>
+            <a:endParaRPr lang="ja-JP" sz="1150" dirty="0"/>
+          </a:p>
+        </p:txBody>
+      </p:sp>
+      <p:sp>
+        <p:nvSpPr>
+          <p:cNvPr id="9" name="step1-screen-frame"/>
           <p:cNvSpPr/>
           <p:nvPr/>
         </p:nvSpPr>
         <p:spPr>
           <a:xfrm>
-            <a:off x="3471672" y="1997964"/>
-            <a:ext cx="310896" cy="384048"/>
-          </a:xfrm>
-          <a:prstGeom prst="rightArrow">
-            <a:avLst/>
-          </a:prstGeom>
-          <a:solidFill>
-            <a:srgbClr val="C9C1B9"/>
-          </a:solidFill>
-          <a:ln w="12700">
+            <a:off x="4396740" y="1152144"/>
+            <a:ext cx="2462784" cy="1060704"/>
+          </a:xfrm>
+          <a:prstGeom prst="rect">
+            <a:avLst/>
+          </a:prstGeom>
+          <a:solidFill>
+            <a:schemeClr val="bg1"/>
+          </a:solidFill>
+          <a:ln w="9525">
             <a:solidFill>
-              <a:srgbClr val="C9C1B9"/>
+              <a:srgbClr val="D6D0CA"/>
             </a:solidFill>
             <a:prstDash val="solid"/>
           </a:ln>
         </p:spPr>
       </p:sp>
-      <p:sp>
-        <p:nvSpPr>
-          <p:cNvPr id="10" name="step2"/>
-          <p:cNvSpPr/>
-          <p:nvPr/>
-        </p:nvSpPr>
-        <p:spPr>
-          <a:xfrm>
-            <a:off x="3883152" y="1298448"/>
-            <a:ext cx="2923032" cy="1783080"/>
-          </a:xfrm>
-          <a:prstGeom prst="roundRect">
-            <a:avLst>
-              <a:gd name="adj" fmla="val 6154"/>
-            </a:avLst>
-          </a:prstGeom>
-          <a:solidFill>
-            <a:schemeClr val="bg2"/>
-          </a:solidFill>
-          <a:ln w="12700">
-            <a:solidFill>
-              <a:schemeClr val="bg2"/>
-            </a:solidFill>
-            <a:prstDash val="solid"/>
-          </a:ln>
-        </p:spPr>
-      </p:sp>
-      <p:sp>
-        <p:nvSpPr>
-          <p:cNvPr id="11" name="step2-num"/>
-          <p:cNvSpPr/>
-          <p:nvPr/>
-        </p:nvSpPr>
-        <p:spPr>
-          <a:xfrm>
-            <a:off x="4066032" y="1481328"/>
-            <a:ext cx="420624" cy="420624"/>
-          </a:xfrm>
-          <a:prstGeom prst="ellipse">
-            <a:avLst/>
-          </a:prstGeom>
-          <a:solidFill>
-            <a:schemeClr val="tx2"/>
-          </a:solidFill>
-          <a:ln w="12700">
-            <a:solidFill>
-              <a:schemeClr val="tx2"/>
-            </a:solidFill>
-            <a:prstDash val="solid"/>
-          </a:ln>
-        </p:spPr>
-      </p:sp>
-      <p:sp>
-        <p:nvSpPr>
-          <p:cNvPr id="12" name="step2-num-text"/>
-          <p:cNvSpPr txBox="1"/>
-          <p:nvPr/>
-        </p:nvSpPr>
-        <p:spPr>
-          <a:xfrm>
-            <a:off x="4066032" y="1481328"/>
-            <a:ext cx="420624" cy="420624"/>
-          </a:xfrm>
-          <a:prstGeom prst="rect">
-            <a:avLst/>
-          </a:prstGeom>
-          <a:noFill/>
-          <a:ln/>
-        </p:spPr>
-        <p:txBody>
-          <a:bodyPr wrap="square" lIns="0" tIns="0" rIns="0" bIns="0" rtlCol="0" anchor="ctr"/>
-          <a:lstStyle/>
-          <a:p>
-            <a:pPr algn="ctr" indent="0" marL="0">
-              <a:buNone/>
-            </a:pPr>
-            <a:r>
-              <a:rPr lang="en-US" sz="1800" b="1" dirty="0">
-                <a:solidFill>
-                  <a:schemeClr val="bg1"/>
-                </a:solidFill>
-              </a:rPr>
-              <a:t>2</a:t>
-            </a:r>
-            <a:endParaRPr lang="en-US" sz="1800" dirty="0"/>
-          </a:p>
-        </p:txBody>
-      </p:sp>
-      <p:sp>
-        <p:nvSpPr>
-          <p:cNvPr id="13" name="step2-title"/>
-          <p:cNvSpPr txBox="1"/>
-          <p:nvPr/>
-        </p:nvSpPr>
-        <p:spPr>
-          <a:xfrm>
-            <a:off x="4596384" y="1481328"/>
-            <a:ext cx="2054352" cy="420624"/>
-          </a:xfrm>
-          <a:prstGeom prst="rect">
-            <a:avLst/>
-          </a:prstGeom>
-          <a:noFill/>
-          <a:ln/>
-        </p:spPr>
-        <p:txBody>
-          <a:bodyPr wrap="square" lIns="0" tIns="0" rIns="0" bIns="0" rtlCol="0" anchor="ctr"/>
-          <a:lstStyle/>
-          <a:p>
-            <a:pPr indent="0" marL="0">
-              <a:buNone/>
-            </a:pPr>
-            <a:r>
-              <a:rPr lang="ja-JP" altLang="en-US" sz="1700" b="1" dirty="0">
-                <a:solidFill>
-                  <a:schemeClr val="tx1"/>
-                </a:solidFill>
-              </a:rPr>
-              <a:t>割引・備考</a:t>
-            </a:r>
-            <a:r>
-              <a:rPr lang="ja-JP" altLang="en-US" sz="1200" dirty="0">
-                <a:solidFill>
-                  <a:srgbClr val="57534E"/>
-                </a:solidFill>
-              </a:rPr>
-              <a:t>（あれば）</a:t>
-            </a:r>
-            <a:endParaRPr lang="ja-JP" sz="1700" dirty="0"/>
-          </a:p>
-        </p:txBody>
-      </p:sp>
-      <p:sp>
-        <p:nvSpPr>
-          <p:cNvPr id="14" name="step2-body"/>
-          <p:cNvSpPr txBox="1"/>
-          <p:nvPr/>
-        </p:nvSpPr>
-        <p:spPr>
-          <a:xfrm>
-            <a:off x="4066032" y="2029968"/>
-            <a:ext cx="2557272" cy="914400"/>
-          </a:xfrm>
-          <a:prstGeom prst="rect">
-            <a:avLst/>
-          </a:prstGeom>
-          <a:noFill/>
-          <a:ln/>
-        </p:spPr>
-        <p:txBody>
-          <a:bodyPr wrap="square" lIns="0" tIns="0" rIns="0" bIns="0" rtlCol="0" anchor="t"/>
-          <a:lstStyle/>
-          <a:p>
-            <a:pPr marL="177800" indent="-177800">
-              <a:spcAft>
-                <a:spcPts val="400"/>
-              </a:spcAft>
-              <a:buSzPct val="100000"/>
-              <a:buChar char="•"/>
-            </a:pPr>
-            <a:r>
-              <a:rPr lang="ja-JP" altLang="en-US" sz="1300" b="1" dirty="0">
-                <a:solidFill>
-                  <a:schemeClr val="tx1"/>
-                </a:solidFill>
-                <a:highlight>
-                  <a:srgbClr val="E7E5E4"/>
-                </a:highlight>
-                <a:latin typeface="Yu Gothic" pitchFamily="34" charset="0"/>
-                <a:ea typeface="Yu Gothic" pitchFamily="34" charset="-122"/>
-                <a:cs typeface="Yu Gothic" pitchFamily="34" charset="-120"/>
-              </a:rPr>
-              <a:t> ↓ </a:t>
-            </a:r>
-            <a:r>
-              <a:rPr lang="ja-JP" altLang="en-US" sz="1300" dirty="0">
-                <a:solidFill>
-                  <a:schemeClr val="tx1"/>
-                </a:solidFill>
-              </a:rPr>
-              <a:t> で割引の欄へ → 引換券番号を 3 桁（例 </a:t>
-            </a:r>
-            <a:r>
-              <a:rPr lang="ja-JP" altLang="en-US" sz="1300" b="1" dirty="0">
-                <a:solidFill>
-                  <a:schemeClr val="tx1"/>
-                </a:solidFill>
-                <a:highlight>
-                  <a:srgbClr val="E7E5E4"/>
-                </a:highlight>
-                <a:latin typeface="Yu Gothic" pitchFamily="34" charset="0"/>
-                <a:ea typeface="Yu Gothic" pitchFamily="34" charset="-122"/>
-                <a:cs typeface="Yu Gothic" pitchFamily="34" charset="-120"/>
-              </a:rPr>
-              <a:t> 001 </a:t>
-            </a:r>
-            <a:r>
-              <a:rPr lang="ja-JP" altLang="en-US" sz="1300" dirty="0">
-                <a:solidFill>
-                  <a:schemeClr val="tx1"/>
-                </a:solidFill>
-              </a:rPr>
-              <a:t>）</a:t>
-            </a:r>
-            <a:endParaRPr lang="ja-JP" sz="1300" dirty="0"/>
-          </a:p>
-          <a:p>
-            <a:pPr marL="177800" indent="-177800">
-              <a:spcAft>
-                <a:spcPts val="400"/>
-              </a:spcAft>
-              <a:buSzPct val="100000"/>
-              <a:buChar char="•"/>
-            </a:pPr>
-            <a:r>
-              <a:rPr lang="ja-JP" altLang="en-US" sz="1300" dirty="0">
-                <a:solidFill>
-                  <a:schemeClr val="tx1"/>
-                </a:solidFill>
-              </a:rPr>
-              <a:t>今年以外の券は「特殊な割引」</a:t>
-            </a:r>
-            <a:endParaRPr lang="ja-JP" sz="1300" dirty="0"/>
-          </a:p>
-          <a:p>
-            <a:pPr marL="177800" indent="-177800">
-              <a:spcAft>
-                <a:spcPts val="400"/>
-              </a:spcAft>
-              <a:buSzPct val="100000"/>
-              <a:buChar char="•"/>
-            </a:pPr>
-            <a:r>
-              <a:rPr lang="ja-JP" altLang="en-US" sz="1300" dirty="0">
-                <a:solidFill>
-                  <a:schemeClr val="tx1"/>
-                </a:solidFill>
-              </a:rPr>
-              <a:t>備考は </a:t>
-            </a:r>
-            <a:r>
-              <a:rPr lang="ja-JP" altLang="en-US" sz="1300" b="1" dirty="0">
-                <a:solidFill>
-                  <a:schemeClr val="tx1"/>
-                </a:solidFill>
-                <a:highlight>
-                  <a:srgbClr val="E7E5E4"/>
-                </a:highlight>
-                <a:latin typeface="Yu Gothic" pitchFamily="34" charset="0"/>
-                <a:ea typeface="Yu Gothic" pitchFamily="34" charset="-122"/>
-                <a:cs typeface="Yu Gothic" pitchFamily="34" charset="-120"/>
-              </a:rPr>
-              <a:t> Space </a:t>
-            </a:r>
-            <a:r>
-              <a:rPr lang="ja-JP" altLang="en-US" sz="1300" dirty="0">
-                <a:solidFill>
-                  <a:schemeClr val="tx1"/>
-                </a:solidFill>
-              </a:rPr>
-              <a:t> で書く</a:t>
-            </a:r>
-            <a:endParaRPr lang="ja-JP" sz="1300" dirty="0"/>
-          </a:p>
-        </p:txBody>
-      </p:sp>
-      <p:sp>
-        <p:nvSpPr>
-          <p:cNvPr id="15" name="arrow2"/>
-          <p:cNvSpPr/>
-          <p:nvPr/>
-        </p:nvSpPr>
-        <p:spPr>
-          <a:xfrm>
-            <a:off x="6897624" y="1997964"/>
-            <a:ext cx="310896" cy="384048"/>
-          </a:xfrm>
-          <a:prstGeom prst="rightArrow">
-            <a:avLst/>
-          </a:prstGeom>
-          <a:solidFill>
-            <a:srgbClr val="C9C1B9"/>
-          </a:solidFill>
-          <a:ln w="12700">
-            <a:solidFill>
-              <a:srgbClr val="C9C1B9"/>
-            </a:solidFill>
-            <a:prstDash val="solid"/>
-          </a:ln>
-        </p:spPr>
-      </p:sp>
-      <p:sp>
-        <p:nvSpPr>
-          <p:cNvPr id="16" name="step3"/>
-          <p:cNvSpPr/>
-          <p:nvPr/>
-        </p:nvSpPr>
-        <p:spPr>
-          <a:xfrm>
-            <a:off x="7309104" y="1298448"/>
-            <a:ext cx="2923032" cy="1783080"/>
-          </a:xfrm>
-          <a:prstGeom prst="roundRect">
-            <a:avLst>
-              <a:gd name="adj" fmla="val 6154"/>
-            </a:avLst>
-          </a:prstGeom>
-          <a:solidFill>
-            <a:schemeClr val="bg2"/>
-          </a:solidFill>
-          <a:ln w="12700">
-            <a:solidFill>
-              <a:schemeClr val="bg2"/>
-            </a:solidFill>
-            <a:prstDash val="solid"/>
-          </a:ln>
-        </p:spPr>
-      </p:sp>
-      <p:sp>
-        <p:nvSpPr>
-          <p:cNvPr id="17" name="step3-num"/>
-          <p:cNvSpPr/>
-          <p:nvPr/>
-        </p:nvSpPr>
-        <p:spPr>
-          <a:xfrm>
-            <a:off x="7491984" y="1481328"/>
-            <a:ext cx="420624" cy="420624"/>
-          </a:xfrm>
-          <a:prstGeom prst="ellipse">
-            <a:avLst/>
-          </a:prstGeom>
-          <a:solidFill>
-            <a:schemeClr val="tx2"/>
-          </a:solidFill>
-          <a:ln w="12700">
-            <a:solidFill>
-              <a:schemeClr val="tx2"/>
-            </a:solidFill>
-            <a:prstDash val="solid"/>
-          </a:ln>
-        </p:spPr>
-      </p:sp>
-      <p:sp>
-        <p:nvSpPr>
-          <p:cNvPr id="18" name="step3-num-text"/>
-          <p:cNvSpPr txBox="1"/>
-          <p:nvPr/>
-        </p:nvSpPr>
-        <p:spPr>
-          <a:xfrm>
-            <a:off x="7491984" y="1481328"/>
-            <a:ext cx="420624" cy="420624"/>
-          </a:xfrm>
-          <a:prstGeom prst="rect">
-            <a:avLst/>
-          </a:prstGeom>
-          <a:noFill/>
-          <a:ln/>
-        </p:spPr>
-        <p:txBody>
-          <a:bodyPr wrap="square" lIns="0" tIns="0" rIns="0" bIns="0" rtlCol="0" anchor="ctr"/>
-          <a:lstStyle/>
-          <a:p>
-            <a:pPr algn="ctr" indent="0" marL="0">
-              <a:buNone/>
-            </a:pPr>
-            <a:r>
-              <a:rPr lang="en-US" sz="1800" b="1" dirty="0">
-                <a:solidFill>
-                  <a:schemeClr val="bg1"/>
-                </a:solidFill>
-              </a:rPr>
-              <a:t>3</a:t>
-            </a:r>
-            <a:endParaRPr lang="en-US" sz="1800" dirty="0"/>
-          </a:p>
-        </p:txBody>
-      </p:sp>
-      <p:sp>
-        <p:nvSpPr>
-          <p:cNvPr id="19" name="step3-title"/>
-          <p:cNvSpPr txBox="1"/>
-          <p:nvPr/>
-        </p:nvSpPr>
-        <p:spPr>
-          <a:xfrm>
-            <a:off x="8022336" y="1481328"/>
-            <a:ext cx="2054352" cy="420624"/>
-          </a:xfrm>
-          <a:prstGeom prst="rect">
-            <a:avLst/>
-          </a:prstGeom>
-          <a:noFill/>
-          <a:ln/>
-        </p:spPr>
-        <p:txBody>
-          <a:bodyPr wrap="square" lIns="0" tIns="0" rIns="0" bIns="0" rtlCol="0" anchor="ctr"/>
-          <a:lstStyle/>
-          <a:p>
-            <a:pPr indent="0" marL="0">
-              <a:buNone/>
-            </a:pPr>
-            <a:r>
-              <a:rPr lang="ja-JP" altLang="en-US" sz="1700" b="1" dirty="0">
-                <a:solidFill>
-                  <a:schemeClr val="tx1"/>
-                </a:solidFill>
-              </a:rPr>
-              <a:t>会計に進む</a:t>
-            </a:r>
-            <a:endParaRPr lang="ja-JP" sz="1700" dirty="0"/>
-          </a:p>
-        </p:txBody>
-      </p:sp>
-      <p:sp>
-        <p:nvSpPr>
-          <p:cNvPr id="20" name="step3-body"/>
-          <p:cNvSpPr txBox="1"/>
-          <p:nvPr/>
-        </p:nvSpPr>
-        <p:spPr>
-          <a:xfrm>
-            <a:off x="7491984" y="2029968"/>
-            <a:ext cx="2557272" cy="914400"/>
-          </a:xfrm>
-          <a:prstGeom prst="rect">
-            <a:avLst/>
-          </a:prstGeom>
-          <a:noFill/>
-          <a:ln/>
-        </p:spPr>
-        <p:txBody>
-          <a:bodyPr wrap="square" lIns="0" tIns="0" rIns="0" bIns="0" rtlCol="0" anchor="t"/>
-          <a:lstStyle/>
-          <a:p>
-            <a:pPr marL="177800" indent="-177800">
-              <a:spcAft>
-                <a:spcPts val="400"/>
-              </a:spcAft>
-              <a:buSzPct val="100000"/>
-              <a:buChar char="•"/>
-            </a:pPr>
-            <a:r>
-              <a:rPr lang="ja-JP" altLang="en-US" sz="1300" b="1" dirty="0">
-                <a:solidFill>
-                  <a:schemeClr val="tx1"/>
-                </a:solidFill>
-                <a:highlight>
-                  <a:srgbClr val="E7E5E4"/>
-                </a:highlight>
-                <a:latin typeface="Yu Gothic" pitchFamily="34" charset="0"/>
-                <a:ea typeface="Yu Gothic" pitchFamily="34" charset="-122"/>
-                <a:cs typeface="Yu Gothic" pitchFamily="34" charset="-120"/>
-              </a:rPr>
-              <a:t> Enter </a:t>
-            </a:r>
-            <a:r>
-              <a:rPr lang="ja-JP" altLang="en-US" sz="1300" dirty="0">
-                <a:solidFill>
-                  <a:schemeClr val="tx1"/>
-                </a:solidFill>
-              </a:rPr>
-              <a:t>（一括会計）</a:t>
-            </a:r>
-            <a:endParaRPr lang="ja-JP" sz="1300" dirty="0"/>
-          </a:p>
-          <a:p>
-            <a:pPr marL="177800" indent="-177800">
-              <a:spcAft>
-                <a:spcPts val="400"/>
-              </a:spcAft>
-              <a:buSzPct val="100000"/>
-              <a:buChar char="•"/>
-            </a:pPr>
-            <a:r>
-              <a:rPr lang="ja-JP" altLang="en-US" sz="1300" dirty="0">
-                <a:solidFill>
-                  <a:schemeClr val="tx1"/>
-                </a:solidFill>
-              </a:rPr>
-              <a:t>商品の入力に戻るときは </a:t>
-            </a:r>
-            <a:r>
-              <a:rPr lang="ja-JP" altLang="en-US" sz="1300" b="1" dirty="0">
-                <a:solidFill>
-                  <a:schemeClr val="tx1"/>
-                </a:solidFill>
-                <a:highlight>
-                  <a:srgbClr val="E7E5E4"/>
-                </a:highlight>
-                <a:latin typeface="Yu Gothic" pitchFamily="34" charset="0"/>
-                <a:ea typeface="Yu Gothic" pitchFamily="34" charset="-122"/>
-                <a:cs typeface="Yu Gothic" pitchFamily="34" charset="-120"/>
-              </a:rPr>
-              <a:t> Esc </a:t>
-            </a:r>
-            <a:r>
-              <a:rPr lang="ja-JP" altLang="en-US" sz="1300" dirty="0">
-                <a:solidFill>
-                  <a:schemeClr val="tx1"/>
-                </a:solidFill>
-              </a:rPr>
-              <a:t>（会計取消）</a:t>
-            </a:r>
-            <a:endParaRPr lang="ja-JP" sz="1300" dirty="0"/>
-          </a:p>
-        </p:txBody>
-      </p:sp>
-      <p:sp>
-        <p:nvSpPr>
-          <p:cNvPr id="21" name="step4-num"/>
-          <p:cNvSpPr/>
-          <p:nvPr/>
-        </p:nvSpPr>
-        <p:spPr>
-          <a:xfrm>
-            <a:off x="457200" y="3264408"/>
-            <a:ext cx="420624" cy="420624"/>
-          </a:xfrm>
-          <a:prstGeom prst="ellipse">
-            <a:avLst/>
-          </a:prstGeom>
-          <a:solidFill>
-            <a:schemeClr val="tx2"/>
-          </a:solidFill>
-          <a:ln w="12700">
-            <a:solidFill>
-              <a:schemeClr val="tx2"/>
-            </a:solidFill>
-            <a:prstDash val="solid"/>
-          </a:ln>
-        </p:spPr>
-      </p:sp>
-      <p:sp>
-        <p:nvSpPr>
-          <p:cNvPr id="22" name="step4-num-text"/>
-          <p:cNvSpPr txBox="1"/>
-          <p:nvPr/>
-        </p:nvSpPr>
-        <p:spPr>
-          <a:xfrm>
-            <a:off x="457200" y="3264408"/>
-            <a:ext cx="420624" cy="420624"/>
-          </a:xfrm>
-          <a:prstGeom prst="rect">
-            <a:avLst/>
-          </a:prstGeom>
-          <a:noFill/>
-          <a:ln/>
-        </p:spPr>
-        <p:txBody>
-          <a:bodyPr wrap="square" lIns="0" tIns="0" rIns="0" bIns="0" rtlCol="0" anchor="ctr"/>
-          <a:lstStyle/>
-          <a:p>
-            <a:pPr algn="ctr" indent="0" marL="0">
-              <a:buNone/>
-            </a:pPr>
-            <a:r>
-              <a:rPr lang="en-US" sz="1800" b="1" dirty="0">
-                <a:solidFill>
-                  <a:schemeClr val="bg1"/>
-                </a:solidFill>
-              </a:rPr>
-              <a:t>4</a:t>
-            </a:r>
-            <a:endParaRPr lang="en-US" sz="1800" dirty="0"/>
-          </a:p>
-        </p:txBody>
-      </p:sp>
-      <p:sp>
-        <p:nvSpPr>
-          <p:cNvPr id="23" name="step4-title"/>
-          <p:cNvSpPr txBox="1"/>
-          <p:nvPr/>
-        </p:nvSpPr>
-        <p:spPr>
-          <a:xfrm>
-            <a:off x="987552" y="3264408"/>
-            <a:ext cx="7315200" cy="420624"/>
-          </a:xfrm>
-          <a:prstGeom prst="rect">
-            <a:avLst/>
-          </a:prstGeom>
-          <a:noFill/>
-          <a:ln/>
-        </p:spPr>
-        <p:txBody>
-          <a:bodyPr wrap="square" lIns="0" tIns="0" rIns="0" bIns="0" rtlCol="0" anchor="ctr"/>
-          <a:lstStyle/>
-          <a:p>
-            <a:pPr indent="0" marL="0">
-              <a:buNone/>
-            </a:pPr>
-            <a:r>
-              <a:rPr lang="ja-JP" altLang="en-US" sz="1700" b="1" dirty="0">
-                <a:solidFill>
-                  <a:schemeClr val="tx1"/>
-                </a:solidFill>
-              </a:rPr>
-              <a:t>受け取る</a:t>
-            </a:r>
-            <a:r>
-              <a:rPr lang="ja-JP" altLang="en-US" sz="1200" dirty="0">
-                <a:solidFill>
-                  <a:srgbClr val="57534E"/>
-                </a:solidFill>
-              </a:rPr>
-              <a:t>　払い方に合わせてどれか 1 つ</a:t>
-            </a:r>
-            <a:endParaRPr lang="ja-JP" sz="1700" dirty="0"/>
-          </a:p>
-        </p:txBody>
-      </p:sp>
-      <p:sp>
-        <p:nvSpPr>
-          <p:cNvPr id="24" name="lane1"/>
-          <p:cNvSpPr/>
-          <p:nvPr/>
-        </p:nvSpPr>
-        <p:spPr>
-          <a:xfrm>
-            <a:off x="457200" y="3794760"/>
-            <a:ext cx="2923032" cy="2103120"/>
-          </a:xfrm>
-          <a:prstGeom prst="roundRect">
-            <a:avLst>
-              <a:gd name="adj" fmla="val 5217"/>
-            </a:avLst>
-          </a:prstGeom>
-          <a:solidFill>
-            <a:schemeClr val="bg1"/>
-          </a:solidFill>
-          <a:ln w="19050">
-            <a:solidFill>
-              <a:schemeClr val="accent2"/>
-            </a:solidFill>
-            <a:prstDash val="solid"/>
-          </a:ln>
-        </p:spPr>
-      </p:sp>
-      <p:sp>
-        <p:nvSpPr>
-          <p:cNvPr id="25" name="lane1-icon-bg"/>
-          <p:cNvSpPr/>
-          <p:nvPr/>
-        </p:nvSpPr>
-        <p:spPr>
-          <a:xfrm>
-            <a:off x="640080" y="3959352"/>
-            <a:ext cx="420624" cy="420624"/>
-          </a:xfrm>
-          <a:prstGeom prst="ellipse">
-            <a:avLst/>
-          </a:prstGeom>
-          <a:solidFill>
-            <a:schemeClr val="accent2"/>
-          </a:solidFill>
-          <a:ln w="12700">
-            <a:solidFill>
-              <a:schemeClr val="accent2"/>
-            </a:solidFill>
-            <a:prstDash val="solid"/>
-          </a:ln>
-        </p:spPr>
-      </p:sp>
       <p:pic>
         <p:nvPicPr>
-          <p:cNvPr id="26" name="lane1-icon" descr="現金">    </p:cNvPr>
+          <p:cNvPr id="10" name="step1-screen" descr="step1-screen">    </p:cNvPr>
           <p:cNvPicPr>
             <a:picLocks noChangeAspect="1"/>
           </p:cNvPicPr>
@@ -2260,8 +1522,8 @@
         </p:blipFill>
         <p:spPr>
           <a:xfrm>
-            <a:off x="722376" y="4041648"/>
-            <a:ext cx="256032" cy="256032"/>
+            <a:off x="4424172" y="1179576"/>
+            <a:ext cx="2407920" cy="1005840"/>
           </a:xfrm>
           <a:prstGeom prst="rect">
             <a:avLst/>
@@ -2270,162 +1532,14 @@
       </p:pic>
       <p:sp>
         <p:nvSpPr>
-          <p:cNvPr id="27" name="lane1-title"/>
-          <p:cNvSpPr txBox="1"/>
-          <p:nvPr/>
-        </p:nvSpPr>
-        <p:spPr>
-          <a:xfrm>
-            <a:off x="1170432" y="3959352"/>
-            <a:ext cx="2054352" cy="420624"/>
-          </a:xfrm>
-          <a:prstGeom prst="rect">
-            <a:avLst/>
-          </a:prstGeom>
-          <a:noFill/>
-          <a:ln/>
-        </p:spPr>
-        <p:txBody>
-          <a:bodyPr wrap="square" lIns="0" tIns="0" rIns="0" bIns="0" rtlCol="0" anchor="ctr"/>
-          <a:lstStyle/>
-          <a:p>
-            <a:pPr indent="0" marL="0">
-              <a:buNone/>
-            </a:pPr>
-            <a:r>
-              <a:rPr lang="ja-JP" altLang="en-US" sz="1500" b="1" dirty="0">
-                <a:solidFill>
-                  <a:schemeClr val="accent2"/>
-                </a:solidFill>
-              </a:rPr>
-              <a:t>現金</a:t>
-            </a:r>
-            <a:endParaRPr lang="ja-JP" sz="1500" dirty="0"/>
-          </a:p>
-        </p:txBody>
-      </p:sp>
-      <p:sp>
-        <p:nvSpPr>
-          <p:cNvPr id="28" name="lane1-body"/>
-          <p:cNvSpPr txBox="1"/>
-          <p:nvPr/>
-        </p:nvSpPr>
-        <p:spPr>
-          <a:xfrm>
-            <a:off x="640080" y="4507992"/>
-            <a:ext cx="2557272" cy="1280160"/>
-          </a:xfrm>
-          <a:prstGeom prst="rect">
-            <a:avLst/>
-          </a:prstGeom>
-          <a:noFill/>
-          <a:ln/>
-        </p:spPr>
-        <p:txBody>
-          <a:bodyPr wrap="square" lIns="0" tIns="0" rIns="0" bIns="0" rtlCol="0" anchor="t"/>
-          <a:lstStyle/>
-          <a:p>
-            <a:pPr marL="177800" indent="-177800">
-              <a:spcAft>
-                <a:spcPts val="400"/>
-              </a:spcAft>
-              <a:buSzPct val="100000"/>
-              <a:buChar char="•"/>
-            </a:pPr>
-            <a:r>
-              <a:rPr lang="ja-JP" altLang="en-US" sz="1300" dirty="0">
-                <a:solidFill>
-                  <a:schemeClr val="tx1"/>
-                </a:solidFill>
-              </a:rPr>
-              <a:t>受け取った金額を数字で打つ</a:t>
-            </a:r>
-            <a:endParaRPr lang="ja-JP" sz="1300" dirty="0"/>
-          </a:p>
-          <a:p>
-            <a:pPr marL="177800" indent="-177800">
-              <a:spcAft>
-                <a:spcPts val="400"/>
-              </a:spcAft>
-              <a:buSzPct val="100000"/>
-              <a:buChar char="•"/>
-            </a:pPr>
-            <a:r>
-              <a:rPr lang="ja-JP" altLang="en-US" sz="1300" dirty="0">
-                <a:solidFill>
-                  <a:schemeClr val="tx1"/>
-                </a:solidFill>
-              </a:rPr>
-              <a:t>ちょうどなら、空のまま </a:t>
-            </a:r>
-            <a:r>
-              <a:rPr lang="ja-JP" altLang="en-US" sz="1300" b="1" dirty="0">
-                <a:solidFill>
-                  <a:schemeClr val="tx1"/>
-                </a:solidFill>
-                <a:highlight>
-                  <a:srgbClr val="E7E5E4"/>
-                </a:highlight>
-                <a:latin typeface="Yu Gothic" pitchFamily="34" charset="0"/>
-                <a:ea typeface="Yu Gothic" pitchFamily="34" charset="-122"/>
-                <a:cs typeface="Yu Gothic" pitchFamily="34" charset="-120"/>
-              </a:rPr>
-              <a:t> Enter </a:t>
-            </a:r>
-            <a:endParaRPr lang="ja-JP" sz="1300" dirty="0"/>
-          </a:p>
-          <a:p>
-            <a:pPr marL="177800" indent="-177800">
-              <a:spcAft>
-                <a:spcPts val="400"/>
-              </a:spcAft>
-              <a:buSzPct val="100000"/>
-              <a:buChar char="•"/>
-            </a:pPr>
-            <a:r>
-              <a:rPr lang="ja-JP" altLang="en-US" sz="1300" dirty="0">
-                <a:solidFill>
-                  <a:schemeClr val="tx1"/>
-                </a:solidFill>
-              </a:rPr>
-              <a:t>お釣りを見て </a:t>
-            </a:r>
-            <a:r>
-              <a:rPr lang="ja-JP" altLang="en-US" sz="1300" b="1" dirty="0">
-                <a:solidFill>
-                  <a:schemeClr val="tx1"/>
-                </a:solidFill>
-                <a:highlight>
-                  <a:srgbClr val="E7E5E4"/>
-                </a:highlight>
-                <a:latin typeface="Yu Gothic" pitchFamily="34" charset="0"/>
-                <a:ea typeface="Yu Gothic" pitchFamily="34" charset="-122"/>
-                <a:cs typeface="Yu Gothic" pitchFamily="34" charset="-120"/>
-              </a:rPr>
-              <a:t> Enter </a:t>
-            </a:r>
-            <a:r>
-              <a:rPr lang="ja-JP" altLang="en-US" sz="1300" dirty="0">
-                <a:solidFill>
-                  <a:schemeClr val="tx1"/>
-                </a:solidFill>
-              </a:rPr>
-              <a:t> で確定</a:t>
-            </a:r>
-            <a:endParaRPr lang="ja-JP" sz="1300" dirty="0"/>
-          </a:p>
-        </p:txBody>
-      </p:sp>
-      <p:sp>
-        <p:nvSpPr>
-          <p:cNvPr id="29" name="lane1-arrow"/>
+          <p:cNvPr id="11" name="step1-arrow"/>
           <p:cNvSpPr/>
           <p:nvPr/>
         </p:nvSpPr>
         <p:spPr>
           <a:xfrm>
-            <a:off x="1726692" y="5971032"/>
-            <a:ext cx="384048" cy="274320"/>
+            <a:off x="722376" y="2331720"/>
+            <a:ext cx="219456" cy="146304"/>
           </a:xfrm>
           <a:prstGeom prst="downArrow">
             <a:avLst/>
@@ -2443,26 +1557,26 @@
       </p:sp>
       <p:sp>
         <p:nvSpPr>
-          <p:cNvPr id="30" name="lane2"/>
+          <p:cNvPr id="12" name="step2"/>
           <p:cNvSpPr/>
           <p:nvPr/>
         </p:nvSpPr>
         <p:spPr>
           <a:xfrm>
-            <a:off x="3883152" y="3794760"/>
-            <a:ext cx="2923032" cy="2103120"/>
+            <a:off x="457200" y="2496312"/>
+            <a:ext cx="6647688" cy="1261872"/>
           </a:xfrm>
           <a:prstGeom prst="roundRect">
             <a:avLst>
-              <a:gd name="adj" fmla="val 5217"/>
+              <a:gd name="adj" fmla="val 7246"/>
             </a:avLst>
           </a:prstGeom>
           <a:solidFill>
-            <a:schemeClr val="bg1"/>
-          </a:solidFill>
-          <a:ln w="19050">
+            <a:schemeClr val="bg2"/>
+          </a:solidFill>
+          <a:ln w="12700">
             <a:solidFill>
-              <a:schemeClr val="accent1"/>
+              <a:schemeClr val="bg2"/>
             </a:solidFill>
             <a:prstDash val="solid"/>
           </a:ln>
@@ -2470,32 +1584,303 @@
       </p:sp>
       <p:sp>
         <p:nvSpPr>
-          <p:cNvPr id="31" name="lane2-icon-bg"/>
+          <p:cNvPr id="13" name="step2-num"/>
           <p:cNvSpPr/>
           <p:nvPr/>
         </p:nvSpPr>
         <p:spPr>
           <a:xfrm>
-            <a:off x="4066032" y="3959352"/>
-            <a:ext cx="420624" cy="420624"/>
+            <a:off x="603504" y="2642616"/>
+            <a:ext cx="457200" cy="457200"/>
           </a:xfrm>
           <a:prstGeom prst="ellipse">
             <a:avLst/>
           </a:prstGeom>
           <a:solidFill>
-            <a:schemeClr val="accent1"/>
+            <a:schemeClr val="tx2"/>
           </a:solidFill>
           <a:ln w="12700">
             <a:solidFill>
-              <a:schemeClr val="accent1"/>
+              <a:schemeClr val="tx2"/>
             </a:solidFill>
             <a:prstDash val="solid"/>
           </a:ln>
         </p:spPr>
       </p:sp>
+      <p:sp>
+        <p:nvSpPr>
+          <p:cNvPr id="14" name="step2-num-text"/>
+          <p:cNvSpPr txBox="1"/>
+          <p:nvPr/>
+        </p:nvSpPr>
+        <p:spPr>
+          <a:xfrm>
+            <a:off x="603504" y="2642616"/>
+            <a:ext cx="457200" cy="457200"/>
+          </a:xfrm>
+          <a:prstGeom prst="rect">
+            <a:avLst/>
+          </a:prstGeom>
+          <a:noFill/>
+          <a:ln/>
+        </p:spPr>
+        <p:txBody>
+          <a:bodyPr wrap="square" lIns="0" tIns="0" rIns="0" bIns="0" rtlCol="0" anchor="ctr"/>
+          <a:lstStyle/>
+          <a:p>
+            <a:pPr algn="ctr" indent="0" marL="0">
+              <a:buNone/>
+            </a:pPr>
+            <a:r>
+              <a:rPr lang="en-US" sz="1800" b="1" dirty="0">
+                <a:solidFill>
+                  <a:schemeClr val="bg1"/>
+                </a:solidFill>
+              </a:rPr>
+              <a:t>2</a:t>
+            </a:r>
+            <a:endParaRPr lang="en-US" sz="1800" dirty="0"/>
+          </a:p>
+        </p:txBody>
+      </p:sp>
+      <p:sp>
+        <p:nvSpPr>
+          <p:cNvPr id="15" name="step2-title"/>
+          <p:cNvSpPr txBox="1"/>
+          <p:nvPr/>
+        </p:nvSpPr>
+        <p:spPr>
+          <a:xfrm>
+            <a:off x="1188720" y="2642616"/>
+            <a:ext cx="3017520" cy="457200"/>
+          </a:xfrm>
+          <a:prstGeom prst="rect">
+            <a:avLst/>
+          </a:prstGeom>
+          <a:noFill/>
+          <a:ln/>
+        </p:spPr>
+        <p:txBody>
+          <a:bodyPr wrap="square" lIns="0" tIns="0" rIns="0" bIns="0" rtlCol="0" anchor="ctr"/>
+          <a:lstStyle/>
+          <a:p>
+            <a:pPr indent="0" marL="0">
+              <a:buNone/>
+            </a:pPr>
+            <a:r>
+              <a:rPr lang="ja-JP" altLang="en-US" sz="1600" b="1" dirty="0">
+                <a:solidFill>
+                  <a:schemeClr val="tx1"/>
+                </a:solidFill>
+              </a:rPr>
+              <a:t>指名する</a:t>
+            </a:r>
+            <a:r>
+              <a:rPr lang="ja-JP" altLang="en-US" sz="1100" dirty="0">
+                <a:solidFill>
+                  <a:srgbClr val="57534E"/>
+                </a:solidFill>
+              </a:rPr>
+              <a:t>（あれば）</a:t>
+            </a:r>
+            <a:endParaRPr lang="ja-JP" sz="1600" dirty="0"/>
+          </a:p>
+        </p:txBody>
+      </p:sp>
+      <p:sp>
+        <p:nvSpPr>
+          <p:cNvPr id="16" name="step2-body"/>
+          <p:cNvSpPr txBox="1"/>
+          <p:nvPr/>
+        </p:nvSpPr>
+        <p:spPr>
+          <a:xfrm>
+            <a:off x="1188720" y="3118104"/>
+            <a:ext cx="3017520" cy="566928"/>
+          </a:xfrm>
+          <a:prstGeom prst="rect">
+            <a:avLst/>
+          </a:prstGeom>
+          <a:noFill/>
+          <a:ln/>
+        </p:spPr>
+        <p:txBody>
+          <a:bodyPr wrap="square" lIns="0" tIns="0" rIns="0" bIns="0" rtlCol="0" anchor="t"/>
+          <a:lstStyle/>
+          <a:p>
+            <a:pPr marL="152400" indent="-152400">
+              <a:spcAft>
+                <a:spcPts val="300"/>
+              </a:spcAft>
+              <a:buSzPct val="100000"/>
+              <a:buChar char="•"/>
+            </a:pPr>
+            <a:r>
+              <a:rPr lang="ja-JP" altLang="en-US" sz="1150" b="1" dirty="0">
+                <a:solidFill>
+                  <a:schemeClr val="tx1"/>
+                </a:solidFill>
+                <a:highlight>
+                  <a:srgbClr val="E7E5E4"/>
+                </a:highlight>
+              </a:rPr>
+              <a:t> ↑ </a:t>
+            </a:r>
+            <a:r>
+              <a:rPr lang="ja-JP" altLang="en-US" sz="1150" b="1" dirty="0">
+                <a:solidFill>
+                  <a:schemeClr val="tx1"/>
+                </a:solidFill>
+                <a:highlight>
+                  <a:srgbClr val="E7E5E4"/>
+                </a:highlight>
+              </a:rPr>
+              <a:t> ↓ </a:t>
+            </a:r>
+            <a:r>
+              <a:rPr lang="ja-JP" altLang="en-US" sz="1150" dirty="0">
+                <a:solidFill>
+                  <a:schemeClr val="tx1"/>
+                </a:solidFill>
+              </a:rPr>
+              <a:t> で行を選ぶ</a:t>
+            </a:r>
+            <a:endParaRPr lang="ja-JP" sz="1150" dirty="0"/>
+          </a:p>
+          <a:p>
+            <a:pPr marL="152400" indent="-152400">
+              <a:spcAft>
+                <a:spcPts val="300"/>
+              </a:spcAft>
+              <a:buSzPct val="100000"/>
+              <a:buChar char="•"/>
+            </a:pPr>
+            <a:r>
+              <a:rPr lang="ja-JP" altLang="en-US" sz="1150" dirty="0">
+                <a:solidFill>
+                  <a:schemeClr val="tx1"/>
+                </a:solidFill>
+              </a:rPr>
+              <a:t>数字 </a:t>
+            </a:r>
+            <a:r>
+              <a:rPr lang="ja-JP" altLang="en-US" sz="1150" b="1" dirty="0">
+                <a:solidFill>
+                  <a:schemeClr val="tx1"/>
+                </a:solidFill>
+                <a:highlight>
+                  <a:srgbClr val="E7E5E4"/>
+                </a:highlight>
+              </a:rPr>
+              <a:t> 1 </a:t>
+            </a:r>
+            <a:r>
+              <a:rPr lang="ja-JP" altLang="en-US" sz="1150" dirty="0">
+                <a:solidFill>
+                  <a:schemeClr val="tx1"/>
+                </a:solidFill>
+              </a:rPr>
+              <a:t>〜</a:t>
+            </a:r>
+            <a:r>
+              <a:rPr lang="ja-JP" altLang="en-US" sz="1150" b="1" dirty="0">
+                <a:solidFill>
+                  <a:schemeClr val="tx1"/>
+                </a:solidFill>
+                <a:highlight>
+                  <a:srgbClr val="E7E5E4"/>
+                </a:highlight>
+              </a:rPr>
+              <a:t> 6 </a:t>
+            </a:r>
+            <a:r>
+              <a:rPr lang="ja-JP" altLang="en-US" sz="1150" dirty="0">
+                <a:solidFill>
+                  <a:schemeClr val="tx1"/>
+                </a:solidFill>
+              </a:rPr>
+              <a:t> で指名（</a:t>
+            </a:r>
+            <a:r>
+              <a:rPr lang="ja-JP" altLang="en-US" sz="1150" b="1" dirty="0">
+                <a:solidFill>
+                  <a:schemeClr val="tx1"/>
+                </a:solidFill>
+                <a:highlight>
+                  <a:srgbClr val="E7E5E4"/>
+                </a:highlight>
+              </a:rPr>
+              <a:t> 0 </a:t>
+            </a:r>
+            <a:r>
+              <a:rPr lang="ja-JP" altLang="en-US" sz="1150" dirty="0">
+                <a:solidFill>
+                  <a:schemeClr val="tx1"/>
+                </a:solidFill>
+              </a:rPr>
+              <a:t> で外す）</a:t>
+            </a:r>
+            <a:endParaRPr lang="ja-JP" sz="1150" dirty="0"/>
+          </a:p>
+          <a:p>
+            <a:pPr marL="152400" indent="-152400">
+              <a:spcAft>
+                <a:spcPts val="300"/>
+              </a:spcAft>
+              <a:buSzPct val="100000"/>
+              <a:buChar char="•"/>
+            </a:pPr>
+            <a:r>
+              <a:rPr lang="ja-JP" altLang="en-US" sz="1150" dirty="0">
+                <a:solidFill>
+                  <a:schemeClr val="tx1"/>
+                </a:solidFill>
+              </a:rPr>
+              <a:t>名前を書くときは </a:t>
+            </a:r>
+            <a:r>
+              <a:rPr lang="ja-JP" altLang="en-US" sz="1150" b="1" dirty="0">
+                <a:solidFill>
+                  <a:schemeClr val="tx1"/>
+                </a:solidFill>
+                <a:highlight>
+                  <a:srgbClr val="E7E5E4"/>
+                </a:highlight>
+              </a:rPr>
+              <a:t> Space </a:t>
+            </a:r>
+            <a:endParaRPr lang="ja-JP" sz="1150" dirty="0"/>
+          </a:p>
+        </p:txBody>
+      </p:sp>
+      <p:sp>
+        <p:nvSpPr>
+          <p:cNvPr id="17" name="step2-screen-frame"/>
+          <p:cNvSpPr/>
+          <p:nvPr/>
+        </p:nvSpPr>
+        <p:spPr>
+          <a:xfrm>
+            <a:off x="4270248" y="2610136"/>
+            <a:ext cx="2715768" cy="1034224"/>
+          </a:xfrm>
+          <a:prstGeom prst="rect">
+            <a:avLst/>
+          </a:prstGeom>
+          <a:solidFill>
+            <a:schemeClr val="bg1"/>
+          </a:solidFill>
+          <a:ln w="9525">
+            <a:solidFill>
+              <a:srgbClr val="D6D0CA"/>
+            </a:solidFill>
+            <a:prstDash val="solid"/>
+          </a:ln>
+        </p:spPr>
+      </p:sp>
       <p:pic>
         <p:nvPicPr>
-          <p:cNvPr id="32" name="lane2-icon" descr="お客さんが端末で選ぶ">    </p:cNvPr>
+          <p:cNvPr id="18" name="step2-screen" descr="step2-screen">    </p:cNvPr>
           <p:cNvPicPr>
             <a:picLocks noChangeAspect="1"/>
           </p:cNvPicPr>
@@ -2509,8 +1894,8 @@
         </p:blipFill>
         <p:spPr>
           <a:xfrm>
-            <a:off x="4148328" y="4041648"/>
-            <a:ext cx="256032" cy="256032"/>
+            <a:off x="4297680" y="2637568"/>
+            <a:ext cx="2660904" cy="979360"/>
           </a:xfrm>
           <a:prstGeom prst="rect">
             <a:avLst/>
@@ -2519,126 +1904,14 @@
       </p:pic>
       <p:sp>
         <p:nvSpPr>
-          <p:cNvPr id="33" name="lane2-title"/>
-          <p:cNvSpPr txBox="1"/>
-          <p:nvPr/>
-        </p:nvSpPr>
-        <p:spPr>
-          <a:xfrm>
-            <a:off x="4596384" y="3959352"/>
-            <a:ext cx="2054352" cy="420624"/>
-          </a:xfrm>
-          <a:prstGeom prst="rect">
-            <a:avLst/>
-          </a:prstGeom>
-          <a:noFill/>
-          <a:ln/>
-        </p:spPr>
-        <p:txBody>
-          <a:bodyPr wrap="square" lIns="0" tIns="0" rIns="0" bIns="0" rtlCol="0" anchor="ctr"/>
-          <a:lstStyle/>
-          <a:p>
-            <a:pPr indent="0" marL="0">
-              <a:buNone/>
-            </a:pPr>
-            <a:r>
-              <a:rPr lang="ja-JP" altLang="en-US" sz="1500" b="1" dirty="0">
-                <a:solidFill>
-                  <a:schemeClr val="accent1"/>
-                </a:solidFill>
-              </a:rPr>
-              <a:t>お客さんが端末で選ぶ</a:t>
-            </a:r>
-            <a:endParaRPr lang="ja-JP" sz="1500" dirty="0"/>
-          </a:p>
-        </p:txBody>
-      </p:sp>
-      <p:sp>
-        <p:nvSpPr>
-          <p:cNvPr id="34" name="lane2-body"/>
-          <p:cNvSpPr txBox="1"/>
-          <p:nvPr/>
-        </p:nvSpPr>
-        <p:spPr>
-          <a:xfrm>
-            <a:off x="4066032" y="4507992"/>
-            <a:ext cx="2557272" cy="1280160"/>
-          </a:xfrm>
-          <a:prstGeom prst="rect">
-            <a:avLst/>
-          </a:prstGeom>
-          <a:noFill/>
-          <a:ln/>
-        </p:spPr>
-        <p:txBody>
-          <a:bodyPr wrap="square" lIns="0" tIns="0" rIns="0" bIns="0" rtlCol="0" anchor="t"/>
-          <a:lstStyle/>
-          <a:p>
-            <a:pPr marL="177800" indent="-177800">
-              <a:spcAft>
-                <a:spcPts val="400"/>
-              </a:spcAft>
-              <a:buSzPct val="100000"/>
-              <a:buChar char="•"/>
-            </a:pPr>
-            <a:r>
-              <a:rPr lang="ja-JP" altLang="en-US" sz="1300" dirty="0">
-                <a:solidFill>
-                  <a:schemeClr val="tx1"/>
-                </a:solidFill>
-              </a:rPr>
-              <a:t>端末に選ぶ画面が出る（レジに「お客さんが端末で選べます」）</a:t>
-            </a:r>
-            <a:endParaRPr lang="ja-JP" sz="1300" dirty="0"/>
-          </a:p>
-          <a:p>
-            <a:pPr marL="177800" indent="-177800">
-              <a:spcAft>
-                <a:spcPts val="400"/>
-              </a:spcAft>
-              <a:buSzPct val="100000"/>
-              <a:buChar char="•"/>
-            </a:pPr>
-            <a:r>
-              <a:rPr lang="ja-JP" altLang="en-US" sz="1300" dirty="0">
-                <a:solidFill>
-                  <a:schemeClr val="tx1"/>
-                </a:solidFill>
-              </a:rPr>
-              <a:t>カード・QR → 端末で払う → 自動で送信</a:t>
-            </a:r>
-            <a:endParaRPr lang="ja-JP" sz="1300" dirty="0"/>
-          </a:p>
-          <a:p>
-            <a:pPr marL="177800" indent="-177800">
-              <a:spcAft>
-                <a:spcPts val="400"/>
-              </a:spcAft>
-              <a:buSzPct val="100000"/>
-              <a:buChar char="•"/>
-            </a:pPr>
-            <a:r>
-              <a:rPr lang="ja-JP" altLang="en-US" sz="1300" dirty="0">
-                <a:solidFill>
-                  <a:schemeClr val="tx1"/>
-                </a:solidFill>
-              </a:rPr>
-              <a:t>現金 → 左の「現金」へ</a:t>
-            </a:r>
-            <a:endParaRPr lang="ja-JP" sz="1300" dirty="0"/>
-          </a:p>
-        </p:txBody>
-      </p:sp>
-      <p:sp>
-        <p:nvSpPr>
-          <p:cNvPr id="35" name="lane2-arrow"/>
+          <p:cNvPr id="19" name="step2-arrow"/>
           <p:cNvSpPr/>
           <p:nvPr/>
         </p:nvSpPr>
         <p:spPr>
           <a:xfrm>
-            <a:off x="5152644" y="5971032"/>
-            <a:ext cx="384048" cy="274320"/>
+            <a:off x="722376" y="3776472"/>
+            <a:ext cx="219456" cy="146304"/>
           </a:xfrm>
           <a:prstGeom prst="downArrow">
             <a:avLst/>
@@ -2656,26 +1929,26 @@
       </p:sp>
       <p:sp>
         <p:nvSpPr>
-          <p:cNvPr id="36" name="lane3"/>
+          <p:cNvPr id="20" name="step3"/>
           <p:cNvSpPr/>
           <p:nvPr/>
         </p:nvSpPr>
         <p:spPr>
           <a:xfrm>
-            <a:off x="7309104" y="3794760"/>
-            <a:ext cx="2923032" cy="2103120"/>
+            <a:off x="457200" y="3941064"/>
+            <a:ext cx="6647688" cy="1417320"/>
           </a:xfrm>
           <a:prstGeom prst="roundRect">
             <a:avLst>
-              <a:gd name="adj" fmla="val 5217"/>
+              <a:gd name="adj" fmla="val 6452"/>
             </a:avLst>
           </a:prstGeom>
           <a:solidFill>
-            <a:schemeClr val="bg1"/>
-          </a:solidFill>
-          <a:ln w="19050">
+            <a:schemeClr val="bg2"/>
+          </a:solidFill>
+          <a:ln w="12700">
             <a:solidFill>
-              <a:schemeClr val="accent1"/>
+              <a:schemeClr val="bg2"/>
             </a:solidFill>
             <a:prstDash val="solid"/>
           </a:ln>
@@ -2683,32 +1956,280 @@
       </p:sp>
       <p:sp>
         <p:nvSpPr>
-          <p:cNvPr id="37" name="lane3-icon-bg"/>
+          <p:cNvPr id="21" name="step3-num"/>
           <p:cNvSpPr/>
           <p:nvPr/>
         </p:nvSpPr>
         <p:spPr>
           <a:xfrm>
-            <a:off x="7491984" y="3959352"/>
-            <a:ext cx="420624" cy="420624"/>
+            <a:off x="603504" y="4087368"/>
+            <a:ext cx="457200" cy="457200"/>
           </a:xfrm>
           <a:prstGeom prst="ellipse">
             <a:avLst/>
           </a:prstGeom>
           <a:solidFill>
-            <a:schemeClr val="accent1"/>
+            <a:schemeClr val="tx2"/>
           </a:solidFill>
           <a:ln w="12700">
             <a:solidFill>
-              <a:schemeClr val="accent1"/>
+              <a:schemeClr val="tx2"/>
             </a:solidFill>
             <a:prstDash val="solid"/>
           </a:ln>
         </p:spPr>
       </p:sp>
+      <p:sp>
+        <p:nvSpPr>
+          <p:cNvPr id="22" name="step3-num-text"/>
+          <p:cNvSpPr txBox="1"/>
+          <p:nvPr/>
+        </p:nvSpPr>
+        <p:spPr>
+          <a:xfrm>
+            <a:off x="603504" y="4087368"/>
+            <a:ext cx="457200" cy="457200"/>
+          </a:xfrm>
+          <a:prstGeom prst="rect">
+            <a:avLst/>
+          </a:prstGeom>
+          <a:noFill/>
+          <a:ln/>
+        </p:spPr>
+        <p:txBody>
+          <a:bodyPr wrap="square" lIns="0" tIns="0" rIns="0" bIns="0" rtlCol="0" anchor="ctr"/>
+          <a:lstStyle/>
+          <a:p>
+            <a:pPr algn="ctr" indent="0" marL="0">
+              <a:buNone/>
+            </a:pPr>
+            <a:r>
+              <a:rPr lang="en-US" sz="1800" b="1" dirty="0">
+                <a:solidFill>
+                  <a:schemeClr val="bg1"/>
+                </a:solidFill>
+              </a:rPr>
+              <a:t>3</a:t>
+            </a:r>
+            <a:endParaRPr lang="en-US" sz="1800" dirty="0"/>
+          </a:p>
+        </p:txBody>
+      </p:sp>
+      <p:sp>
+        <p:nvSpPr>
+          <p:cNvPr id="23" name="step3-title"/>
+          <p:cNvSpPr txBox="1"/>
+          <p:nvPr/>
+        </p:nvSpPr>
+        <p:spPr>
+          <a:xfrm>
+            <a:off x="1188720" y="4087368"/>
+            <a:ext cx="3017520" cy="457200"/>
+          </a:xfrm>
+          <a:prstGeom prst="rect">
+            <a:avLst/>
+          </a:prstGeom>
+          <a:noFill/>
+          <a:ln/>
+        </p:spPr>
+        <p:txBody>
+          <a:bodyPr wrap="square" lIns="0" tIns="0" rIns="0" bIns="0" rtlCol="0" anchor="ctr"/>
+          <a:lstStyle/>
+          <a:p>
+            <a:pPr indent="0" marL="0">
+              <a:buNone/>
+            </a:pPr>
+            <a:r>
+              <a:rPr lang="ja-JP" altLang="en-US" sz="1600" b="1" dirty="0">
+                <a:solidFill>
+                  <a:schemeClr val="tx1"/>
+                </a:solidFill>
+              </a:rPr>
+              <a:t>割引・備考</a:t>
+            </a:r>
+            <a:r>
+              <a:rPr lang="ja-JP" altLang="en-US" sz="1100" dirty="0">
+                <a:solidFill>
+                  <a:srgbClr val="57534E"/>
+                </a:solidFill>
+              </a:rPr>
+              <a:t>（あれば）</a:t>
+            </a:r>
+            <a:endParaRPr lang="ja-JP" sz="1600" dirty="0"/>
+          </a:p>
+        </p:txBody>
+      </p:sp>
+      <p:sp>
+        <p:nvSpPr>
+          <p:cNvPr id="24" name="step3-body"/>
+          <p:cNvSpPr txBox="1"/>
+          <p:nvPr/>
+        </p:nvSpPr>
+        <p:spPr>
+          <a:xfrm>
+            <a:off x="1188720" y="4562856"/>
+            <a:ext cx="3017520" cy="722376"/>
+          </a:xfrm>
+          <a:prstGeom prst="rect">
+            <a:avLst/>
+          </a:prstGeom>
+          <a:noFill/>
+          <a:ln/>
+        </p:spPr>
+        <p:txBody>
+          <a:bodyPr wrap="square" lIns="0" tIns="0" rIns="0" bIns="0" rtlCol="0" anchor="t"/>
+          <a:lstStyle/>
+          <a:p>
+            <a:pPr marL="152400" indent="-152400">
+              <a:spcAft>
+                <a:spcPts val="300"/>
+              </a:spcAft>
+              <a:buSzPct val="100000"/>
+              <a:buChar char="•"/>
+            </a:pPr>
+            <a:r>
+              <a:rPr lang="ja-JP" altLang="en-US" sz="1150" b="1" dirty="0">
+                <a:solidFill>
+                  <a:schemeClr val="tx1"/>
+                </a:solidFill>
+                <a:highlight>
+                  <a:srgbClr val="E7E5E4"/>
+                </a:highlight>
+              </a:rPr>
+              <a:t> ↓ </a:t>
+            </a:r>
+            <a:r>
+              <a:rPr lang="ja-JP" altLang="en-US" sz="1150" dirty="0">
+                <a:solidFill>
+                  <a:schemeClr val="tx1"/>
+                </a:solidFill>
+              </a:rPr>
+              <a:t> で割引の欄へ</a:t>
+            </a:r>
+            <a:endParaRPr lang="ja-JP" sz="1150" dirty="0"/>
+          </a:p>
+          <a:p>
+            <a:pPr marL="152400" indent="-152400">
+              <a:spcAft>
+                <a:spcPts val="300"/>
+              </a:spcAft>
+              <a:buSzPct val="100000"/>
+              <a:buChar char="•"/>
+            </a:pPr>
+            <a:r>
+              <a:rPr lang="ja-JP" altLang="en-US" sz="1150" dirty="0">
+                <a:solidFill>
+                  <a:schemeClr val="tx1"/>
+                </a:solidFill>
+              </a:rPr>
+              <a:t>引換券番号を 3 桁で打つ（例 </a:t>
+            </a:r>
+            <a:r>
+              <a:rPr lang="ja-JP" altLang="en-US" sz="1150" b="1" dirty="0">
+                <a:solidFill>
+                  <a:schemeClr val="tx1"/>
+                </a:solidFill>
+                <a:highlight>
+                  <a:srgbClr val="E7E5E4"/>
+                </a:highlight>
+              </a:rPr>
+              <a:t> 001 </a:t>
+            </a:r>
+            <a:r>
+              <a:rPr lang="ja-JP" altLang="en-US" sz="1150" dirty="0">
+                <a:solidFill>
+                  <a:schemeClr val="tx1"/>
+                </a:solidFill>
+              </a:rPr>
+              <a:t>）</a:t>
+            </a:r>
+            <a:endParaRPr lang="ja-JP" sz="1150" dirty="0"/>
+          </a:p>
+          <a:p>
+            <a:pPr marL="152400" indent="-152400">
+              <a:spcAft>
+                <a:spcPts val="300"/>
+              </a:spcAft>
+              <a:buSzPct val="100000"/>
+              <a:buChar char="•"/>
+            </a:pPr>
+            <a:r>
+              <a:rPr lang="ja-JP" altLang="en-US" sz="1150" dirty="0">
+                <a:solidFill>
+                  <a:schemeClr val="tx1"/>
+                </a:solidFill>
+              </a:rPr>
+              <a:t>今年以外の券は「特殊な割引」</a:t>
+            </a:r>
+            <a:endParaRPr lang="ja-JP" sz="1150" dirty="0"/>
+          </a:p>
+          <a:p>
+            <a:pPr marL="152400" indent="-152400">
+              <a:spcAft>
+                <a:spcPts val="300"/>
+              </a:spcAft>
+              <a:buSzPct val="100000"/>
+              <a:buChar char="•"/>
+            </a:pPr>
+            <a:r>
+              <a:rPr lang="ja-JP" altLang="en-US" sz="1150" dirty="0">
+                <a:solidFill>
+                  <a:schemeClr val="tx1"/>
+                </a:solidFill>
+              </a:rPr>
+              <a:t>備考は </a:t>
+            </a:r>
+            <a:r>
+              <a:rPr lang="ja-JP" altLang="en-US" sz="1150" b="1" dirty="0">
+                <a:solidFill>
+                  <a:schemeClr val="tx1"/>
+                </a:solidFill>
+                <a:highlight>
+                  <a:srgbClr val="E7E5E4"/>
+                </a:highlight>
+              </a:rPr>
+              <a:t> Space </a:t>
+            </a:r>
+            <a:r>
+              <a:rPr lang="ja-JP" altLang="en-US" sz="1150" dirty="0">
+                <a:solidFill>
+                  <a:schemeClr val="tx1"/>
+                </a:solidFill>
+              </a:rPr>
+              <a:t> で書く</a:t>
+            </a:r>
+            <a:endParaRPr lang="ja-JP" sz="1150" dirty="0"/>
+          </a:p>
+        </p:txBody>
+      </p:sp>
+      <p:sp>
+        <p:nvSpPr>
+          <p:cNvPr id="25" name="step3-screen-frame"/>
+          <p:cNvSpPr/>
+          <p:nvPr/>
+        </p:nvSpPr>
+        <p:spPr>
+          <a:xfrm>
+            <a:off x="4270248" y="4173409"/>
+            <a:ext cx="2715768" cy="952630"/>
+          </a:xfrm>
+          <a:prstGeom prst="rect">
+            <a:avLst/>
+          </a:prstGeom>
+          <a:solidFill>
+            <a:schemeClr val="bg1"/>
+          </a:solidFill>
+          <a:ln w="9525">
+            <a:solidFill>
+              <a:srgbClr val="D6D0CA"/>
+            </a:solidFill>
+            <a:prstDash val="solid"/>
+          </a:ln>
+        </p:spPr>
+      </p:sp>
       <p:pic>
         <p:nvPicPr>
-          <p:cNvPr id="38" name="lane3-icon" descr="レジで Square を選ぶ">    </p:cNvPr>
+          <p:cNvPr id="26" name="step3-screen" descr="step3-screen">    </p:cNvPr>
           <p:cNvPicPr>
             <a:picLocks noChangeAspect="1"/>
           </p:cNvPicPr>
@@ -2722,8 +2243,8 @@
         </p:blipFill>
         <p:spPr>
           <a:xfrm>
-            <a:off x="7574280" y="4041648"/>
-            <a:ext cx="256032" cy="256032"/>
+            <a:off x="4297680" y="4200841"/>
+            <a:ext cx="2660904" cy="897766"/>
           </a:xfrm>
           <a:prstGeom prst="rect">
             <a:avLst/>
@@ -2732,198 +2253,14 @@
       </p:pic>
       <p:sp>
         <p:nvSpPr>
-          <p:cNvPr id="39" name="lane3-title"/>
-          <p:cNvSpPr txBox="1"/>
-          <p:nvPr/>
-        </p:nvSpPr>
-        <p:spPr>
-          <a:xfrm>
-            <a:off x="8022336" y="3959352"/>
-            <a:ext cx="2054352" cy="420624"/>
-          </a:xfrm>
-          <a:prstGeom prst="rect">
-            <a:avLst/>
-          </a:prstGeom>
-          <a:noFill/>
-          <a:ln/>
-        </p:spPr>
-        <p:txBody>
-          <a:bodyPr wrap="square" lIns="0" tIns="0" rIns="0" bIns="0" rtlCol="0" anchor="ctr"/>
-          <a:lstStyle/>
-          <a:p>
-            <a:pPr indent="0" marL="0">
-              <a:buNone/>
-            </a:pPr>
-            <a:r>
-              <a:rPr lang="ja-JP" altLang="en-US" sz="1500" b="1" dirty="0">
-                <a:solidFill>
-                  <a:schemeClr val="accent1"/>
-                </a:solidFill>
-              </a:rPr>
-              <a:t>レジで Square を選ぶ</a:t>
-            </a:r>
-            <a:endParaRPr lang="ja-JP" sz="1500" dirty="0"/>
-          </a:p>
-        </p:txBody>
-      </p:sp>
-      <p:sp>
-        <p:nvSpPr>
-          <p:cNvPr id="40" name="lane3-body"/>
-          <p:cNvSpPr txBox="1"/>
-          <p:nvPr/>
-        </p:nvSpPr>
-        <p:spPr>
-          <a:xfrm>
-            <a:off x="7491984" y="4507992"/>
-            <a:ext cx="2557272" cy="1280160"/>
-          </a:xfrm>
-          <a:prstGeom prst="rect">
-            <a:avLst/>
-          </a:prstGeom>
-          <a:noFill/>
-          <a:ln/>
-        </p:spPr>
-        <p:txBody>
-          <a:bodyPr wrap="square" lIns="0" tIns="0" rIns="0" bIns="0" rtlCol="0" anchor="t"/>
-          <a:lstStyle/>
-          <a:p>
-            <a:pPr marL="177800" indent="-177800">
-              <a:spcAft>
-                <a:spcPts val="400"/>
-              </a:spcAft>
-              <a:buSzPct val="100000"/>
-              <a:buChar char="•"/>
-            </a:pPr>
-            <a:r>
-              <a:rPr lang="ja-JP" altLang="en-US" sz="1300" b="1" dirty="0">
-                <a:solidFill>
-                  <a:schemeClr val="tx1"/>
-                </a:solidFill>
-                <a:highlight>
-                  <a:srgbClr val="E7E5E4"/>
-                </a:highlight>
-                <a:latin typeface="Yu Gothic" pitchFamily="34" charset="0"/>
-                <a:ea typeface="Yu Gothic" pitchFamily="34" charset="-122"/>
-                <a:cs typeface="Yu Gothic" pitchFamily="34" charset="-120"/>
-              </a:rPr>
-              <a:t> ↓ </a:t>
-            </a:r>
-            <a:r>
-              <a:rPr lang="ja-JP" altLang="en-US" sz="1300" dirty="0">
-                <a:solidFill>
-                  <a:schemeClr val="tx1"/>
-                </a:solidFill>
-              </a:rPr>
-              <a:t> でカード／QR コード → </a:t>
-            </a:r>
-            <a:r>
-              <a:rPr lang="ja-JP" altLang="en-US" sz="1300" b="1" dirty="0">
-                <a:solidFill>
-                  <a:schemeClr val="tx1"/>
-                </a:solidFill>
-                <a:highlight>
-                  <a:srgbClr val="E7E5E4"/>
-                </a:highlight>
-                <a:latin typeface="Yu Gothic" pitchFamily="34" charset="0"/>
-                <a:ea typeface="Yu Gothic" pitchFamily="34" charset="-122"/>
-                <a:cs typeface="Yu Gothic" pitchFamily="34" charset="-120"/>
-              </a:rPr>
-              <a:t> Enter </a:t>
-            </a:r>
-            <a:r>
-              <a:rPr lang="ja-JP" altLang="en-US" sz="1300" dirty="0">
-                <a:solidFill>
-                  <a:schemeClr val="tx1"/>
-                </a:solidFill>
-              </a:rPr>
-              <a:t>（端末に送る）</a:t>
-            </a:r>
-            <a:endParaRPr lang="ja-JP" sz="1300" dirty="0"/>
-          </a:p>
-          <a:p>
-            <a:pPr marL="177800" indent="-177800">
-              <a:spcAft>
-                <a:spcPts val="400"/>
-              </a:spcAft>
-              <a:buSzPct val="100000"/>
-              <a:buChar char="•"/>
-            </a:pPr>
-            <a:r>
-              <a:rPr lang="ja-JP" altLang="en-US" sz="1300" dirty="0">
-                <a:solidFill>
-                  <a:schemeClr val="tx1"/>
-                </a:solidFill>
-              </a:rPr>
-              <a:t>端末で払う → 自動で送信</a:t>
-            </a:r>
-            <a:endParaRPr lang="ja-JP" sz="1300" dirty="0"/>
-          </a:p>
-          <a:p>
-            <a:pPr marL="177800" indent="-177800">
-              <a:spcAft>
-                <a:spcPts val="400"/>
-              </a:spcAft>
-              <a:buSzPct val="100000"/>
-              <a:buChar char="•"/>
-            </a:pPr>
-            <a:r>
-              <a:rPr lang="ja-JP" altLang="en-US" sz="1300" dirty="0">
-                <a:solidFill>
-                  <a:schemeClr val="tx1"/>
-                </a:solidFill>
-              </a:rPr>
-              <a:t>近道：カードは </a:t>
-            </a:r>
-            <a:r>
-              <a:rPr lang="ja-JP" altLang="en-US" sz="1300" b="1" dirty="0">
-                <a:solidFill>
-                  <a:schemeClr val="tx1"/>
-                </a:solidFill>
-                <a:highlight>
-                  <a:srgbClr val="E7E5E4"/>
-                </a:highlight>
-                <a:latin typeface="Yu Gothic" pitchFamily="34" charset="0"/>
-                <a:ea typeface="Yu Gothic" pitchFamily="34" charset="-122"/>
-                <a:cs typeface="Yu Gothic" pitchFamily="34" charset="-120"/>
-              </a:rPr>
-              <a:t> Alt+T </a:t>
-            </a:r>
-            <a:r>
-              <a:rPr lang="ja-JP" altLang="en-US" sz="1300" dirty="0">
-                <a:solidFill>
-                  <a:schemeClr val="tx1"/>
-                </a:solidFill>
-              </a:rPr>
-              <a:t>、QR は </a:t>
-            </a:r>
-            <a:r>
-              <a:rPr lang="ja-JP" altLang="en-US" sz="1300" b="1" dirty="0">
-                <a:solidFill>
-                  <a:schemeClr val="tx1"/>
-                </a:solidFill>
-                <a:highlight>
-                  <a:srgbClr val="E7E5E4"/>
-                </a:highlight>
-                <a:latin typeface="Yu Gothic" pitchFamily="34" charset="0"/>
-                <a:ea typeface="Yu Gothic" pitchFamily="34" charset="-122"/>
-                <a:cs typeface="Yu Gothic" pitchFamily="34" charset="-120"/>
-              </a:rPr>
-              <a:t> Alt+Q </a:t>
-            </a:r>
-            <a:endParaRPr lang="ja-JP" sz="1300" dirty="0"/>
-          </a:p>
-        </p:txBody>
-      </p:sp>
-      <p:sp>
-        <p:nvSpPr>
-          <p:cNvPr id="41" name="lane3-arrow"/>
+          <p:cNvPr id="27" name="step3-arrow"/>
           <p:cNvSpPr/>
           <p:nvPr/>
         </p:nvSpPr>
         <p:spPr>
           <a:xfrm>
-            <a:off x="8578596" y="5971032"/>
-            <a:ext cx="384048" cy="274320"/>
+            <a:off x="722376" y="5376672"/>
+            <a:ext cx="219456" cy="146304"/>
           </a:xfrm>
           <a:prstGeom prst="downArrow">
             <a:avLst/>
@@ -2941,18 +2278,739 @@
       </p:sp>
       <p:sp>
         <p:nvSpPr>
-          <p:cNvPr id="42" name="done"/>
+          <p:cNvPr id="28" name="step4"/>
           <p:cNvSpPr/>
           <p:nvPr/>
         </p:nvSpPr>
         <p:spPr>
           <a:xfrm>
-            <a:off x="457200" y="6281928"/>
-            <a:ext cx="9774936" cy="658368"/>
+            <a:off x="457200" y="5541264"/>
+            <a:ext cx="6647688" cy="1417320"/>
           </a:xfrm>
           <a:prstGeom prst="roundRect">
             <a:avLst>
-              <a:gd name="adj" fmla="val 16667"/>
+              <a:gd name="adj" fmla="val 6452"/>
+            </a:avLst>
+          </a:prstGeom>
+          <a:solidFill>
+            <a:schemeClr val="bg2"/>
+          </a:solidFill>
+          <a:ln w="12700">
+            <a:solidFill>
+              <a:schemeClr val="bg2"/>
+            </a:solidFill>
+            <a:prstDash val="solid"/>
+          </a:ln>
+        </p:spPr>
+      </p:sp>
+      <p:sp>
+        <p:nvSpPr>
+          <p:cNvPr id="29" name="step4-num"/>
+          <p:cNvSpPr/>
+          <p:nvPr/>
+        </p:nvSpPr>
+        <p:spPr>
+          <a:xfrm>
+            <a:off x="603504" y="5687568"/>
+            <a:ext cx="457200" cy="457200"/>
+          </a:xfrm>
+          <a:prstGeom prst="ellipse">
+            <a:avLst/>
+          </a:prstGeom>
+          <a:solidFill>
+            <a:schemeClr val="tx2"/>
+          </a:solidFill>
+          <a:ln w="12700">
+            <a:solidFill>
+              <a:schemeClr val="tx2"/>
+            </a:solidFill>
+            <a:prstDash val="solid"/>
+          </a:ln>
+        </p:spPr>
+      </p:sp>
+      <p:sp>
+        <p:nvSpPr>
+          <p:cNvPr id="30" name="step4-num-text"/>
+          <p:cNvSpPr txBox="1"/>
+          <p:nvPr/>
+        </p:nvSpPr>
+        <p:spPr>
+          <a:xfrm>
+            <a:off x="603504" y="5687568"/>
+            <a:ext cx="457200" cy="457200"/>
+          </a:xfrm>
+          <a:prstGeom prst="rect">
+            <a:avLst/>
+          </a:prstGeom>
+          <a:noFill/>
+          <a:ln/>
+        </p:spPr>
+        <p:txBody>
+          <a:bodyPr wrap="square" lIns="0" tIns="0" rIns="0" bIns="0" rtlCol="0" anchor="ctr"/>
+          <a:lstStyle/>
+          <a:p>
+            <a:pPr algn="ctr" indent="0" marL="0">
+              <a:buNone/>
+            </a:pPr>
+            <a:r>
+              <a:rPr lang="en-US" sz="1800" b="1" dirty="0">
+                <a:solidFill>
+                  <a:schemeClr val="bg1"/>
+                </a:solidFill>
+              </a:rPr>
+              <a:t>4</a:t>
+            </a:r>
+            <a:endParaRPr lang="en-US" sz="1800" dirty="0"/>
+          </a:p>
+        </p:txBody>
+      </p:sp>
+      <p:sp>
+        <p:nvSpPr>
+          <p:cNvPr id="31" name="step4-title"/>
+          <p:cNvSpPr txBox="1"/>
+          <p:nvPr/>
+        </p:nvSpPr>
+        <p:spPr>
+          <a:xfrm>
+            <a:off x="1188720" y="5687568"/>
+            <a:ext cx="3017520" cy="457200"/>
+          </a:xfrm>
+          <a:prstGeom prst="rect">
+            <a:avLst/>
+          </a:prstGeom>
+          <a:noFill/>
+          <a:ln/>
+        </p:spPr>
+        <p:txBody>
+          <a:bodyPr wrap="square" lIns="0" tIns="0" rIns="0" bIns="0" rtlCol="0" anchor="ctr"/>
+          <a:lstStyle/>
+          <a:p>
+            <a:pPr indent="0" marL="0">
+              <a:buNone/>
+            </a:pPr>
+            <a:r>
+              <a:rPr lang="ja-JP" altLang="en-US" sz="1600" b="1" dirty="0">
+                <a:solidFill>
+                  <a:schemeClr val="tx1"/>
+                </a:solidFill>
+              </a:rPr>
+              <a:t>会計に進む</a:t>
+            </a:r>
+            <a:endParaRPr lang="ja-JP" sz="1600" dirty="0"/>
+          </a:p>
+        </p:txBody>
+      </p:sp>
+      <p:sp>
+        <p:nvSpPr>
+          <p:cNvPr id="32" name="step4-body"/>
+          <p:cNvSpPr txBox="1"/>
+          <p:nvPr/>
+        </p:nvSpPr>
+        <p:spPr>
+          <a:xfrm>
+            <a:off x="1188720" y="6163056"/>
+            <a:ext cx="3017520" cy="722376"/>
+          </a:xfrm>
+          <a:prstGeom prst="rect">
+            <a:avLst/>
+          </a:prstGeom>
+          <a:noFill/>
+          <a:ln/>
+        </p:spPr>
+        <p:txBody>
+          <a:bodyPr wrap="square" lIns="0" tIns="0" rIns="0" bIns="0" rtlCol="0" anchor="t"/>
+          <a:lstStyle/>
+          <a:p>
+            <a:pPr marL="152400" indent="-152400">
+              <a:spcAft>
+                <a:spcPts val="300"/>
+              </a:spcAft>
+              <a:buSzPct val="100000"/>
+              <a:buChar char="•"/>
+            </a:pPr>
+            <a:r>
+              <a:rPr lang="ja-JP" altLang="en-US" sz="1150" b="1" dirty="0">
+                <a:solidFill>
+                  <a:schemeClr val="tx1"/>
+                </a:solidFill>
+                <a:highlight>
+                  <a:srgbClr val="E7E5E4"/>
+                </a:highlight>
+              </a:rPr>
+              <a:t> Enter </a:t>
+            </a:r>
+            <a:r>
+              <a:rPr lang="ja-JP" altLang="en-US" sz="1150" dirty="0">
+                <a:solidFill>
+                  <a:schemeClr val="tx1"/>
+                </a:solidFill>
+              </a:rPr>
+              <a:t>（一括会計）</a:t>
+            </a:r>
+            <a:endParaRPr lang="ja-JP" sz="1150" dirty="0"/>
+          </a:p>
+          <a:p>
+            <a:pPr marL="152400" indent="-152400">
+              <a:spcAft>
+                <a:spcPts val="300"/>
+              </a:spcAft>
+              <a:buSzPct val="100000"/>
+              <a:buChar char="•"/>
+            </a:pPr>
+            <a:r>
+              <a:rPr lang="ja-JP" altLang="en-US" sz="1150" dirty="0">
+                <a:solidFill>
+                  <a:schemeClr val="tx1"/>
+                </a:solidFill>
+              </a:rPr>
+              <a:t>Square 端末にも払い方を選ぶ画面が出る（お客さんが選べる）</a:t>
+            </a:r>
+            <a:endParaRPr lang="ja-JP" sz="1150" dirty="0"/>
+          </a:p>
+          <a:p>
+            <a:pPr marL="152400" indent="-152400">
+              <a:spcAft>
+                <a:spcPts val="300"/>
+              </a:spcAft>
+              <a:buSzPct val="100000"/>
+              <a:buChar char="•"/>
+            </a:pPr>
+            <a:r>
+              <a:rPr lang="ja-JP" altLang="en-US" sz="1150" dirty="0">
+                <a:solidFill>
+                  <a:schemeClr val="tx1"/>
+                </a:solidFill>
+              </a:rPr>
+              <a:t>戻るときは </a:t>
+            </a:r>
+            <a:r>
+              <a:rPr lang="ja-JP" altLang="en-US" sz="1150" b="1" dirty="0">
+                <a:solidFill>
+                  <a:schemeClr val="tx1"/>
+                </a:solidFill>
+                <a:highlight>
+                  <a:srgbClr val="E7E5E4"/>
+                </a:highlight>
+              </a:rPr>
+              <a:t> Esc </a:t>
+            </a:r>
+            <a:endParaRPr lang="ja-JP" sz="1150" dirty="0"/>
+          </a:p>
+        </p:txBody>
+      </p:sp>
+      <p:sp>
+        <p:nvSpPr>
+          <p:cNvPr id="33" name="step4-screen-frame"/>
+          <p:cNvSpPr/>
+          <p:nvPr/>
+        </p:nvSpPr>
+        <p:spPr>
+          <a:xfrm>
+            <a:off x="4525679" y="5641848"/>
+            <a:ext cx="2204906" cy="1216152"/>
+          </a:xfrm>
+          <a:prstGeom prst="rect">
+            <a:avLst/>
+          </a:prstGeom>
+          <a:solidFill>
+            <a:schemeClr val="bg1"/>
+          </a:solidFill>
+          <a:ln w="9525">
+            <a:solidFill>
+              <a:srgbClr val="D6D0CA"/>
+            </a:solidFill>
+            <a:prstDash val="solid"/>
+          </a:ln>
+        </p:spPr>
+      </p:sp>
+      <p:pic>
+        <p:nvPicPr>
+          <p:cNvPr id="34" name="step4-screen" descr="step4-screen">    </p:cNvPr>
+          <p:cNvPicPr>
+            <a:picLocks noChangeAspect="1"/>
+          </p:cNvPicPr>
+          <p:nvPr/>
+        </p:nvPicPr>
+        <p:blipFill>
+          <a:blip r:embed="rId4"/>
+          <a:stretch>
+            <a:fillRect/>
+          </a:stretch>
+        </p:blipFill>
+        <p:spPr>
+          <a:xfrm>
+            <a:off x="4553111" y="5669280"/>
+            <a:ext cx="2150042" cy="1161288"/>
+          </a:xfrm>
+          <a:prstGeom prst="rect">
+            <a:avLst/>
+          </a:prstGeom>
+        </p:spPr>
+      </p:pic>
+      <p:sp>
+        <p:nvSpPr>
+          <p:cNvPr id="35" name="step4-arrow"/>
+          <p:cNvSpPr/>
+          <p:nvPr/>
+        </p:nvSpPr>
+        <p:spPr>
+          <a:xfrm>
+            <a:off x="722376" y="6976872"/>
+            <a:ext cx="219456" cy="146304"/>
+          </a:xfrm>
+          <a:prstGeom prst="downArrow">
+            <a:avLst/>
+          </a:prstGeom>
+          <a:solidFill>
+            <a:srgbClr val="C9C1B9"/>
+          </a:solidFill>
+          <a:ln w="12700">
+            <a:solidFill>
+              <a:srgbClr val="C9C1B9"/>
+            </a:solidFill>
+            <a:prstDash val="solid"/>
+          </a:ln>
+        </p:spPr>
+      </p:sp>
+      <p:sp>
+        <p:nvSpPr>
+          <p:cNvPr id="36" name="step5"/>
+          <p:cNvSpPr/>
+          <p:nvPr/>
+        </p:nvSpPr>
+        <p:spPr>
+          <a:xfrm>
+            <a:off x="457200" y="7141464"/>
+            <a:ext cx="6647688" cy="1691640"/>
+          </a:xfrm>
+          <a:prstGeom prst="roundRect">
+            <a:avLst>
+              <a:gd name="adj" fmla="val 5405"/>
+            </a:avLst>
+          </a:prstGeom>
+          <a:solidFill>
+            <a:schemeClr val="bg2"/>
+          </a:solidFill>
+          <a:ln w="12700">
+            <a:solidFill>
+              <a:schemeClr val="bg2"/>
+            </a:solidFill>
+            <a:prstDash val="solid"/>
+          </a:ln>
+        </p:spPr>
+      </p:sp>
+      <p:sp>
+        <p:nvSpPr>
+          <p:cNvPr id="37" name="step5-num"/>
+          <p:cNvSpPr/>
+          <p:nvPr/>
+        </p:nvSpPr>
+        <p:spPr>
+          <a:xfrm>
+            <a:off x="603504" y="7287768"/>
+            <a:ext cx="457200" cy="457200"/>
+          </a:xfrm>
+          <a:prstGeom prst="ellipse">
+            <a:avLst/>
+          </a:prstGeom>
+          <a:solidFill>
+            <a:schemeClr val="tx2"/>
+          </a:solidFill>
+          <a:ln w="12700">
+            <a:solidFill>
+              <a:schemeClr val="tx2"/>
+            </a:solidFill>
+            <a:prstDash val="solid"/>
+          </a:ln>
+        </p:spPr>
+      </p:sp>
+      <p:sp>
+        <p:nvSpPr>
+          <p:cNvPr id="38" name="step5-num-text"/>
+          <p:cNvSpPr txBox="1"/>
+          <p:nvPr/>
+        </p:nvSpPr>
+        <p:spPr>
+          <a:xfrm>
+            <a:off x="603504" y="7287768"/>
+            <a:ext cx="457200" cy="457200"/>
+          </a:xfrm>
+          <a:prstGeom prst="rect">
+            <a:avLst/>
+          </a:prstGeom>
+          <a:noFill/>
+          <a:ln/>
+        </p:spPr>
+        <p:txBody>
+          <a:bodyPr wrap="square" lIns="0" tIns="0" rIns="0" bIns="0" rtlCol="0" anchor="ctr"/>
+          <a:lstStyle/>
+          <a:p>
+            <a:pPr algn="ctr" indent="0" marL="0">
+              <a:buNone/>
+            </a:pPr>
+            <a:r>
+              <a:rPr lang="en-US" sz="1800" b="1" dirty="0">
+                <a:solidFill>
+                  <a:schemeClr val="bg1"/>
+                </a:solidFill>
+              </a:rPr>
+              <a:t>5</a:t>
+            </a:r>
+            <a:endParaRPr lang="en-US" sz="1800" dirty="0"/>
+          </a:p>
+        </p:txBody>
+      </p:sp>
+      <p:sp>
+        <p:nvSpPr>
+          <p:cNvPr id="39" name="step5-title"/>
+          <p:cNvSpPr txBox="1"/>
+          <p:nvPr/>
+        </p:nvSpPr>
+        <p:spPr>
+          <a:xfrm>
+            <a:off x="1188720" y="7287768"/>
+            <a:ext cx="3017520" cy="457200"/>
+          </a:xfrm>
+          <a:prstGeom prst="rect">
+            <a:avLst/>
+          </a:prstGeom>
+          <a:noFill/>
+          <a:ln/>
+        </p:spPr>
+        <p:txBody>
+          <a:bodyPr wrap="square" lIns="0" tIns="0" rIns="0" bIns="0" rtlCol="0" anchor="ctr"/>
+          <a:lstStyle/>
+          <a:p>
+            <a:pPr indent="0" marL="0">
+              <a:buNone/>
+            </a:pPr>
+            <a:r>
+              <a:rPr lang="ja-JP" altLang="en-US" sz="1600" b="1" dirty="0">
+                <a:solidFill>
+                  <a:schemeClr val="tx1"/>
+                </a:solidFill>
+              </a:rPr>
+              <a:t>受け取る</a:t>
+            </a:r>
+            <a:endParaRPr lang="ja-JP" sz="1600" dirty="0"/>
+          </a:p>
+        </p:txBody>
+      </p:sp>
+      <p:sp>
+        <p:nvSpPr>
+          <p:cNvPr id="40" name="step5-body"/>
+          <p:cNvSpPr txBox="1"/>
+          <p:nvPr/>
+        </p:nvSpPr>
+        <p:spPr>
+          <a:xfrm>
+            <a:off x="1188720" y="7763256"/>
+            <a:ext cx="3017520" cy="996696"/>
+          </a:xfrm>
+          <a:prstGeom prst="rect">
+            <a:avLst/>
+          </a:prstGeom>
+          <a:noFill/>
+          <a:ln/>
+        </p:spPr>
+        <p:txBody>
+          <a:bodyPr wrap="square" lIns="0" tIns="0" rIns="0" bIns="0" rtlCol="0" anchor="t"/>
+          <a:lstStyle/>
+          <a:p>
+            <a:pPr marL="152400" indent="-152400">
+              <a:spcAft>
+                <a:spcPts val="300"/>
+              </a:spcAft>
+              <a:buSzPct val="100000"/>
+              <a:buChar char="•"/>
+            </a:pPr>
+            <a:r>
+              <a:rPr lang="ja-JP" altLang="en-US" sz="1150" b="1" dirty="0">
+                <a:solidFill>
+                  <a:schemeClr val="accent2"/>
+                </a:solidFill>
+              </a:rPr>
+              <a:t>現金：</a:t>
+            </a:r>
+            <a:r>
+              <a:rPr lang="ja-JP" altLang="en-US" sz="1150" dirty="0">
+                <a:solidFill>
+                  <a:schemeClr val="tx1"/>
+                </a:solidFill>
+              </a:rPr>
+              <a:t>金額を打つ → お釣りを見て </a:t>
+            </a:r>
+            <a:r>
+              <a:rPr lang="ja-JP" altLang="en-US" sz="1150" b="1" dirty="0">
+                <a:solidFill>
+                  <a:schemeClr val="tx1"/>
+                </a:solidFill>
+                <a:highlight>
+                  <a:srgbClr val="E7E5E4"/>
+                </a:highlight>
+              </a:rPr>
+              <a:t> Enter </a:t>
+            </a:r>
+            <a:endParaRPr lang="ja-JP" sz="1150" dirty="0"/>
+          </a:p>
+          <a:p>
+            <a:pPr marL="152400" indent="-152400">
+              <a:spcAft>
+                <a:spcPts val="300"/>
+              </a:spcAft>
+              <a:buSzPct val="100000"/>
+              <a:buChar char="•"/>
+            </a:pPr>
+            <a:r>
+              <a:rPr lang="ja-JP" altLang="en-US" sz="1150" dirty="0">
+                <a:solidFill>
+                  <a:schemeClr val="tx1"/>
+                </a:solidFill>
+              </a:rPr>
+              <a:t>ちょうどなら、空のまま </a:t>
+            </a:r>
+            <a:r>
+              <a:rPr lang="ja-JP" altLang="en-US" sz="1150" b="1" dirty="0">
+                <a:solidFill>
+                  <a:schemeClr val="tx1"/>
+                </a:solidFill>
+                <a:highlight>
+                  <a:srgbClr val="E7E5E4"/>
+                </a:highlight>
+              </a:rPr>
+              <a:t> Enter </a:t>
+            </a:r>
+            <a:r>
+              <a:rPr lang="ja-JP" altLang="en-US" sz="1150" dirty="0">
+                <a:solidFill>
+                  <a:schemeClr val="tx1"/>
+                </a:solidFill>
+              </a:rPr>
+              <a:t> を 2 回</a:t>
+            </a:r>
+            <a:endParaRPr lang="ja-JP" sz="1150" dirty="0"/>
+          </a:p>
+          <a:p>
+            <a:pPr marL="152400" indent="-152400">
+              <a:spcAft>
+                <a:spcPts val="300"/>
+              </a:spcAft>
+              <a:buSzPct val="100000"/>
+              <a:buChar char="•"/>
+            </a:pPr>
+            <a:r>
+              <a:rPr lang="ja-JP" altLang="en-US" sz="1150" b="1" dirty="0">
+                <a:solidFill>
+                  <a:schemeClr val="accent1"/>
+                </a:solidFill>
+              </a:rPr>
+              <a:t>カード・QR：</a:t>
+            </a:r>
+            <a:r>
+              <a:rPr lang="ja-JP" altLang="en-US" sz="1150" dirty="0">
+                <a:solidFill>
+                  <a:schemeClr val="tx1"/>
+                </a:solidFill>
+              </a:rPr>
+              <a:t>お客さんが端末で選ぶ（レジで選ぶなら </a:t>
+            </a:r>
+            <a:r>
+              <a:rPr lang="ja-JP" altLang="en-US" sz="1150" b="1" dirty="0">
+                <a:solidFill>
+                  <a:schemeClr val="tx1"/>
+                </a:solidFill>
+                <a:highlight>
+                  <a:srgbClr val="E7E5E4"/>
+                </a:highlight>
+              </a:rPr>
+              <a:t> ↓ </a:t>
+            </a:r>
+            <a:r>
+              <a:rPr lang="ja-JP" altLang="en-US" sz="1150" dirty="0">
+                <a:solidFill>
+                  <a:schemeClr val="tx1"/>
+                </a:solidFill>
+              </a:rPr>
+              <a:t> → </a:t>
+            </a:r>
+            <a:r>
+              <a:rPr lang="ja-JP" altLang="en-US" sz="1150" b="1" dirty="0">
+                <a:solidFill>
+                  <a:schemeClr val="tx1"/>
+                </a:solidFill>
+                <a:highlight>
+                  <a:srgbClr val="E7E5E4"/>
+                </a:highlight>
+              </a:rPr>
+              <a:t> Enter </a:t>
+            </a:r>
+            <a:r>
+              <a:rPr lang="ja-JP" altLang="en-US" sz="1150" dirty="0">
+                <a:solidFill>
+                  <a:schemeClr val="tx1"/>
+                </a:solidFill>
+              </a:rPr>
+              <a:t>）</a:t>
+            </a:r>
+            <a:endParaRPr lang="ja-JP" sz="1150" dirty="0"/>
+          </a:p>
+          <a:p>
+            <a:pPr marL="152400" indent="-152400">
+              <a:spcAft>
+                <a:spcPts val="300"/>
+              </a:spcAft>
+              <a:buSzPct val="100000"/>
+              <a:buChar char="•"/>
+            </a:pPr>
+            <a:r>
+              <a:rPr lang="ja-JP" altLang="en-US" sz="1150" dirty="0">
+                <a:solidFill>
+                  <a:schemeClr val="tx1"/>
+                </a:solidFill>
+              </a:rPr>
+              <a:t>端末で払ってもらうと、自動で送信</a:t>
+            </a:r>
+            <a:endParaRPr lang="ja-JP" sz="1150" dirty="0"/>
+          </a:p>
+        </p:txBody>
+      </p:sp>
+      <p:sp>
+        <p:nvSpPr>
+          <p:cNvPr id="41" name="step5-cash-screen-frame"/>
+          <p:cNvSpPr/>
+          <p:nvPr/>
+        </p:nvSpPr>
+        <p:spPr>
+          <a:xfrm>
+            <a:off x="4270248" y="7636930"/>
+            <a:ext cx="1321308" cy="700708"/>
+          </a:xfrm>
+          <a:prstGeom prst="rect">
+            <a:avLst/>
+          </a:prstGeom>
+          <a:solidFill>
+            <a:schemeClr val="bg1"/>
+          </a:solidFill>
+          <a:ln w="9525">
+            <a:solidFill>
+              <a:srgbClr val="D6D0CA"/>
+            </a:solidFill>
+            <a:prstDash val="solid"/>
+          </a:ln>
+        </p:spPr>
+      </p:sp>
+      <p:pic>
+        <p:nvPicPr>
+          <p:cNvPr id="42" name="step5-cash-screen" descr="step5-cash-screen">    </p:cNvPr>
+          <p:cNvPicPr>
+            <a:picLocks noChangeAspect="1"/>
+          </p:cNvPicPr>
+          <p:nvPr/>
+        </p:nvPicPr>
+        <p:blipFill>
+          <a:blip r:embed="rId5"/>
+          <a:stretch>
+            <a:fillRect/>
+          </a:stretch>
+        </p:blipFill>
+        <p:spPr>
+          <a:xfrm>
+            <a:off x="4297680" y="7664362"/>
+            <a:ext cx="1266444" cy="645844"/>
+          </a:xfrm>
+          <a:prstGeom prst="rect">
+            <a:avLst/>
+          </a:prstGeom>
+        </p:spPr>
+      </p:pic>
+      <p:sp>
+        <p:nvSpPr>
+          <p:cNvPr id="43" name="step5-square-screen-frame"/>
+          <p:cNvSpPr/>
+          <p:nvPr/>
+        </p:nvSpPr>
+        <p:spPr>
+          <a:xfrm>
+            <a:off x="5664708" y="7508337"/>
+            <a:ext cx="1321308" cy="957894"/>
+          </a:xfrm>
+          <a:prstGeom prst="rect">
+            <a:avLst/>
+          </a:prstGeom>
+          <a:solidFill>
+            <a:schemeClr val="bg1"/>
+          </a:solidFill>
+          <a:ln w="9525">
+            <a:solidFill>
+              <a:srgbClr val="D6D0CA"/>
+            </a:solidFill>
+            <a:prstDash val="solid"/>
+          </a:ln>
+        </p:spPr>
+      </p:sp>
+      <p:pic>
+        <p:nvPicPr>
+          <p:cNvPr id="44" name="step5-square-screen" descr="step5-square-screen">    </p:cNvPr>
+          <p:cNvPicPr>
+            <a:picLocks noChangeAspect="1"/>
+          </p:cNvPicPr>
+          <p:nvPr/>
+        </p:nvPicPr>
+        <p:blipFill>
+          <a:blip r:embed="rId6"/>
+          <a:stretch>
+            <a:fillRect/>
+          </a:stretch>
+        </p:blipFill>
+        <p:spPr>
+          <a:xfrm>
+            <a:off x="5692140" y="7535769"/>
+            <a:ext cx="1266444" cy="903030"/>
+          </a:xfrm>
+          <a:prstGeom prst="rect">
+            <a:avLst/>
+          </a:prstGeom>
+        </p:spPr>
+      </p:pic>
+      <p:sp>
+        <p:nvSpPr>
+          <p:cNvPr id="45" name="step5-arrow"/>
+          <p:cNvSpPr/>
+          <p:nvPr/>
+        </p:nvSpPr>
+        <p:spPr>
+          <a:xfrm>
+            <a:off x="722376" y="8851392"/>
+            <a:ext cx="219456" cy="146304"/>
+          </a:xfrm>
+          <a:prstGeom prst="downArrow">
+            <a:avLst/>
+          </a:prstGeom>
+          <a:solidFill>
+            <a:srgbClr val="C9C1B9"/>
+          </a:solidFill>
+          <a:ln w="12700">
+            <a:solidFill>
+              <a:srgbClr val="C9C1B9"/>
+            </a:solidFill>
+            <a:prstDash val="solid"/>
+          </a:ln>
+        </p:spPr>
+      </p:sp>
+      <p:sp>
+        <p:nvSpPr>
+          <p:cNvPr id="46" name="step6"/>
+          <p:cNvSpPr/>
+          <p:nvPr/>
+        </p:nvSpPr>
+        <p:spPr>
+          <a:xfrm>
+            <a:off x="457200" y="9015984"/>
+            <a:ext cx="6647688" cy="1024128"/>
+          </a:xfrm>
+          <a:prstGeom prst="roundRect">
+            <a:avLst>
+              <a:gd name="adj" fmla="val 8929"/>
             </a:avLst>
           </a:prstGeom>
           <a:solidFill>
@@ -2968,14 +3026,14 @@
       </p:sp>
       <p:sp>
         <p:nvSpPr>
-          <p:cNvPr id="43" name="done-num"/>
+          <p:cNvPr id="47" name="step6-num"/>
           <p:cNvSpPr/>
           <p:nvPr/>
         </p:nvSpPr>
         <p:spPr>
           <a:xfrm>
-            <a:off x="640080" y="6400800"/>
-            <a:ext cx="420624" cy="420624"/>
+            <a:off x="603504" y="9162288"/>
+            <a:ext cx="457200" cy="457200"/>
           </a:xfrm>
           <a:prstGeom prst="ellipse">
             <a:avLst/>
@@ -2993,14 +3051,14 @@
       </p:sp>
       <p:sp>
         <p:nvSpPr>
-          <p:cNvPr id="44" name="done-num-text"/>
+          <p:cNvPr id="48" name="step6-num-text"/>
           <p:cNvSpPr txBox="1"/>
           <p:nvPr/>
         </p:nvSpPr>
         <p:spPr>
           <a:xfrm>
-            <a:off x="640080" y="6400800"/>
-            <a:ext cx="420624" cy="420624"/>
+            <a:off x="603504" y="9162288"/>
+            <a:ext cx="457200" cy="457200"/>
           </a:xfrm>
           <a:prstGeom prst="rect">
             <a:avLst/>
@@ -3021,7 +3079,7 @@
                   <a:schemeClr val="bg1"/>
                 </a:solidFill>
               </a:rPr>
-              <a:t>5</a:t>
+              <a:t>6</a:t>
             </a:r>
             <a:endParaRPr lang="en-US" sz="1800" dirty="0"/>
           </a:p>
@@ -3029,14 +3087,14 @@
       </p:sp>
       <p:sp>
         <p:nvSpPr>
-          <p:cNvPr id="45" name="done-text"/>
+          <p:cNvPr id="49" name="step6-title"/>
           <p:cNvSpPr txBox="1"/>
           <p:nvPr/>
         </p:nvSpPr>
         <p:spPr>
           <a:xfrm>
-            <a:off x="1170432" y="6281928"/>
-            <a:ext cx="8860536" cy="658368"/>
+            <a:off x="1188720" y="9162288"/>
+            <a:ext cx="3017520" cy="457200"/>
           </a:xfrm>
           <a:prstGeom prst="rect">
             <a:avLst/>
@@ -3052,35 +3110,134 @@
               <a:buNone/>
             </a:pPr>
             <a:r>
-              <a:rPr lang="ja-JP" altLang="en-US" sz="1700" b="1" dirty="0">
-                <a:solidFill>
-                  <a:schemeClr val="accent5"/>
-                </a:solidFill>
-              </a:rPr>
-              <a:t>完了　</a:t>
-            </a:r>
-            <a:r>
-              <a:rPr lang="ja-JP" altLang="en-US" sz="1300" dirty="0">
-                <a:solidFill>
-                  <a:schemeClr val="tx1"/>
-                </a:solidFill>
-              </a:rPr>
-              <a:t>「No.N を送信しました」が出てベルが鳴る → シールとレシートが出る → 次の注文へ</a:t>
-            </a:r>
-            <a:endParaRPr lang="ja-JP" sz="1700" dirty="0"/>
-          </a:p>
-        </p:txBody>
-      </p:sp>
-      <p:sp>
-        <p:nvSpPr>
-          <p:cNvPr id="46" name="Text 41"/>
+              <a:rPr lang="ja-JP" altLang="en-US" sz="1600" b="1" dirty="0">
+                <a:solidFill>
+                  <a:schemeClr val="tx1"/>
+                </a:solidFill>
+              </a:rPr>
+              <a:t>完了</a:t>
+            </a:r>
+            <a:endParaRPr lang="ja-JP" sz="1600" dirty="0"/>
+          </a:p>
+        </p:txBody>
+      </p:sp>
+      <p:sp>
+        <p:nvSpPr>
+          <p:cNvPr id="50" name="step6-body"/>
           <p:cNvSpPr txBox="1"/>
           <p:nvPr/>
         </p:nvSpPr>
         <p:spPr>
           <a:xfrm>
-            <a:off x="457200" y="7178040"/>
-            <a:ext cx="4572000" cy="228600"/>
+            <a:off x="1188720" y="9637776"/>
+            <a:ext cx="3017520" cy="329184"/>
+          </a:xfrm>
+          <a:prstGeom prst="rect">
+            <a:avLst/>
+          </a:prstGeom>
+          <a:noFill/>
+          <a:ln/>
+        </p:spPr>
+        <p:txBody>
+          <a:bodyPr wrap="square" lIns="0" tIns="0" rIns="0" bIns="0" rtlCol="0" anchor="t"/>
+          <a:lstStyle/>
+          <a:p>
+            <a:pPr marL="152400" indent="-152400">
+              <a:spcAft>
+                <a:spcPts val="300"/>
+              </a:spcAft>
+              <a:buSzPct val="100000"/>
+              <a:buChar char="•"/>
+            </a:pPr>
+            <a:r>
+              <a:rPr lang="ja-JP" altLang="en-US" sz="1150" dirty="0">
+                <a:solidFill>
+                  <a:schemeClr val="tx1"/>
+                </a:solidFill>
+              </a:rPr>
+              <a:t>「No.N を送信しました」とベル</a:t>
+            </a:r>
+            <a:endParaRPr lang="ja-JP" sz="1150" dirty="0"/>
+          </a:p>
+          <a:p>
+            <a:pPr marL="152400" indent="-152400">
+              <a:spcAft>
+                <a:spcPts val="300"/>
+              </a:spcAft>
+              <a:buSzPct val="100000"/>
+              <a:buChar char="•"/>
+            </a:pPr>
+            <a:r>
+              <a:rPr lang="ja-JP" altLang="en-US" sz="1150" dirty="0">
+                <a:solidFill>
+                  <a:schemeClr val="tx1"/>
+                </a:solidFill>
+              </a:rPr>
+              <a:t>シールとレシートが出る → 次の注文へ</a:t>
+            </a:r>
+            <a:endParaRPr lang="ja-JP" sz="1150" dirty="0"/>
+          </a:p>
+        </p:txBody>
+      </p:sp>
+      <p:sp>
+        <p:nvSpPr>
+          <p:cNvPr id="51" name="step6-screen-frame"/>
+          <p:cNvSpPr/>
+          <p:nvPr/>
+        </p:nvSpPr>
+        <p:spPr>
+          <a:xfrm>
+            <a:off x="4270248" y="9200381"/>
+            <a:ext cx="2715768" cy="655333"/>
+          </a:xfrm>
+          <a:prstGeom prst="rect">
+            <a:avLst/>
+          </a:prstGeom>
+          <a:solidFill>
+            <a:schemeClr val="bg1"/>
+          </a:solidFill>
+          <a:ln w="9525">
+            <a:solidFill>
+              <a:srgbClr val="D6D0CA"/>
+            </a:solidFill>
+            <a:prstDash val="solid"/>
+          </a:ln>
+        </p:spPr>
+      </p:sp>
+      <p:pic>
+        <p:nvPicPr>
+          <p:cNvPr id="52" name="step6-screen" descr="step6-screen">    </p:cNvPr>
+          <p:cNvPicPr>
+            <a:picLocks noChangeAspect="1"/>
+          </p:cNvPicPr>
+          <p:nvPr/>
+        </p:nvPicPr>
+        <p:blipFill>
+          <a:blip r:embed="rId7"/>
+          <a:stretch>
+            <a:fillRect/>
+          </a:stretch>
+        </p:blipFill>
+        <p:spPr>
+          <a:xfrm>
+            <a:off x="4297680" y="9227813"/>
+            <a:ext cx="2660904" cy="600469"/>
+          </a:xfrm>
+          <a:prstGeom prst="rect">
+            <a:avLst/>
+          </a:prstGeom>
+        </p:spPr>
+      </p:pic>
+      <p:sp>
+        <p:nvSpPr>
+          <p:cNvPr id="53" name="Text 44"/>
+          <p:cNvSpPr txBox="1"/>
+          <p:nvPr/>
+        </p:nvSpPr>
+        <p:spPr>
+          <a:xfrm>
+            <a:off x="457200" y="10259568"/>
+            <a:ext cx="3657600" cy="228600"/>
           </a:xfrm>
           <a:prstGeom prst="rect">
             <a:avLst/>
@@ -3119,7 +3276,7 @@
         </p:nvSpPr>
         <p:spPr>
           <a:xfrm>
-            <a:off x="9317736" y="7178040"/>
+            <a:off x="6190488" y="10259568"/>
             <a:ext cx="914400" cy="228600"/>
           </a:xfrm>
           <a:prstGeom prst="rect">
@@ -3187,8 +3344,8 @@
         </p:nvSpPr>
         <p:spPr>
           <a:xfrm>
-            <a:off x="457200" y="320040"/>
-            <a:ext cx="7498080" cy="566928"/>
+            <a:off x="457200" y="365760"/>
+            <a:ext cx="4389120" cy="548640"/>
           </a:xfrm>
           <a:prstGeom prst="rect">
             <a:avLst/>
@@ -3204,14 +3361,14 @@
               <a:buNone/>
             </a:pPr>
             <a:r>
-              <a:rPr lang="ja-JP" altLang="en-US" sz="2800" b="1" dirty="0">
+              <a:rPr lang="ja-JP" altLang="en-US" sz="2600" b="1" dirty="0">
                 <a:solidFill>
                   <a:schemeClr val="tx2"/>
                 </a:solidFill>
               </a:rPr>
               <a:t>こんなときは</a:t>
             </a:r>
-            <a:endParaRPr lang="ja-JP" sz="2800" dirty="0"/>
+            <a:endParaRPr lang="ja-JP" sz="2600" dirty="0"/>
           </a:p>
         </p:txBody>
       </p:sp>
@@ -3223,12 +3380,12 @@
         </p:nvSpPr>
         <p:spPr>
           <a:xfrm>
-            <a:off x="457200" y="1143000"/>
-            <a:ext cx="3075432" cy="2788920"/>
+            <a:off x="457200" y="1051560"/>
+            <a:ext cx="3223260" cy="2892552"/>
           </a:xfrm>
           <a:prstGeom prst="roundRect">
             <a:avLst>
-              <a:gd name="adj" fmla="val 3934"/>
+              <a:gd name="adj" fmla="val 3161"/>
             </a:avLst>
           </a:prstGeom>
           <a:solidFill>
@@ -3250,8 +3407,8 @@
         </p:nvSpPr>
         <p:spPr>
           <a:xfrm>
-            <a:off x="658368" y="1344168"/>
-            <a:ext cx="475488" cy="475488"/>
+            <a:off x="621792" y="1197864"/>
+            <a:ext cx="402336" cy="402336"/>
           </a:xfrm>
           <a:prstGeom prst="ellipse">
             <a:avLst/>
@@ -3283,8 +3440,8 @@
         </p:blipFill>
         <p:spPr>
           <a:xfrm>
-            <a:off x="749808" y="1435608"/>
-            <a:ext cx="292608" cy="292608"/>
+            <a:off x="694944" y="1271016"/>
+            <a:ext cx="256032" cy="256032"/>
           </a:xfrm>
           <a:prstGeom prst="rect">
             <a:avLst/>
@@ -3299,8 +3456,8 @@
         </p:nvSpPr>
         <p:spPr>
           <a:xfrm>
-            <a:off x="1261872" y="1344168"/>
-            <a:ext cx="2115312" cy="475488"/>
+            <a:off x="1133856" y="1197864"/>
+            <a:ext cx="2400300" cy="402336"/>
           </a:xfrm>
           <a:prstGeom prst="rect">
             <a:avLst/>
@@ -3316,180 +3473,45 @@
               <a:buNone/>
             </a:pPr>
             <a:r>
-              <a:rPr lang="ja-JP" altLang="en-US" sz="1600" b="1" dirty="0">
+              <a:rPr lang="ja-JP" altLang="en-US" sz="1500" b="1" dirty="0">
                 <a:solidFill>
                   <a:schemeClr val="tx1"/>
                 </a:solidFill>
               </a:rPr>
               <a:t>分けて払いたい</a:t>
             </a:r>
-            <a:endParaRPr lang="ja-JP" sz="1600" dirty="0"/>
-          </a:p>
-        </p:txBody>
-      </p:sp>
-      <p:sp>
-        <p:nvSpPr>
-          <p:cNvPr id="7" name="case1-body"/>
-          <p:cNvSpPr txBox="1"/>
-          <p:nvPr/>
-        </p:nvSpPr>
-        <p:spPr>
-          <a:xfrm>
-            <a:off x="658368" y="1984248"/>
-            <a:ext cx="2673096" cy="1828800"/>
-          </a:xfrm>
-          <a:prstGeom prst="rect">
-            <a:avLst/>
-          </a:prstGeom>
-          <a:noFill/>
-          <a:ln/>
-        </p:spPr>
-        <p:txBody>
-          <a:bodyPr wrap="square" lIns="0" tIns="0" rIns="0" bIns="0" rtlCol="0" anchor="t"/>
-          <a:lstStyle/>
-          <a:p>
-            <a:pPr marL="177800" indent="-177800">
-              <a:spcAft>
-                <a:spcPts val="400"/>
-              </a:spcAft>
-              <a:buSzPct val="100000"/>
-              <a:buChar char="•"/>
-            </a:pPr>
-            <a:r>
-              <a:rPr lang="ja-JP" altLang="en-US" sz="1300" dirty="0">
-                <a:solidFill>
-                  <a:schemeClr val="tx1"/>
-                </a:solidFill>
-              </a:rPr>
-              <a:t>商品ごと：「個別小計」で商品を選ぶ</a:t>
-            </a:r>
-            <a:endParaRPr lang="ja-JP" sz="1300" dirty="0"/>
-          </a:p>
-          <a:p>
-            <a:pPr marL="177800" indent="-177800">
-              <a:spcAft>
-                <a:spcPts val="400"/>
-              </a:spcAft>
-              <a:buSzPct val="100000"/>
-              <a:buChar char="•"/>
-            </a:pPr>
-            <a:r>
-              <a:rPr lang="ja-JP" altLang="en-US" sz="1300" dirty="0">
-                <a:solidFill>
-                  <a:schemeClr val="tx1"/>
-                </a:solidFill>
-              </a:rPr>
-              <a:t>金額で：会計中に「小計分割・一部金額先払い」</a:t>
-            </a:r>
-            <a:endParaRPr lang="ja-JP" sz="1300" dirty="0"/>
-          </a:p>
-          <a:p>
-            <a:pPr marL="177800" indent="-177800">
-              <a:spcAft>
-                <a:spcPts val="400"/>
-              </a:spcAft>
-              <a:buSzPct val="100000"/>
-              <a:buChar char="•"/>
-            </a:pPr>
-            <a:r>
-              <a:rPr lang="ja-JP" altLang="en-US" sz="1300" dirty="0">
-                <a:solidFill>
-                  <a:schemeClr val="tx1"/>
-                </a:solidFill>
-              </a:rPr>
-              <a:t>受け取るたびに「残りを全て会計」などを選ぶ</a:t>
-            </a:r>
-            <a:endParaRPr lang="ja-JP" sz="1300" dirty="0"/>
-          </a:p>
-          <a:p>
-            <a:pPr marL="177800" indent="-177800">
-              <a:spcAft>
-                <a:spcPts val="400"/>
-              </a:spcAft>
-              <a:buSzPct val="100000"/>
-              <a:buChar char="•"/>
-            </a:pPr>
-            <a:r>
-              <a:rPr lang="ja-JP" altLang="en-US" sz="1300" dirty="0">
-                <a:solidFill>
-                  <a:schemeClr val="tx1"/>
-                </a:solidFill>
-              </a:rPr>
-              <a:t>最後に「会計しました」→ </a:t>
-            </a:r>
-            <a:r>
-              <a:rPr lang="ja-JP" altLang="en-US" sz="1300" b="1" dirty="0">
-                <a:solidFill>
-                  <a:schemeClr val="tx1"/>
-                </a:solidFill>
-                <a:highlight>
-                  <a:srgbClr val="E7E5E4"/>
-                </a:highlight>
-                <a:latin typeface="Yu Gothic" pitchFamily="34" charset="0"/>
-                <a:ea typeface="Yu Gothic" pitchFamily="34" charset="-122"/>
-                <a:cs typeface="Yu Gothic" pitchFamily="34" charset="-120"/>
-              </a:rPr>
-              <a:t> Enter </a:t>
-            </a:r>
-            <a:endParaRPr lang="ja-JP" sz="1300" dirty="0"/>
-          </a:p>
-        </p:txBody>
-      </p:sp>
-      <p:sp>
-        <p:nvSpPr>
-          <p:cNvPr id="8" name="case2"/>
+            <a:endParaRPr lang="ja-JP" sz="1500" dirty="0"/>
+          </a:p>
+        </p:txBody>
+      </p:sp>
+      <p:sp>
+        <p:nvSpPr>
+          <p:cNvPr id="7" name="case1-screen-frame"/>
           <p:cNvSpPr/>
           <p:nvPr/>
         </p:nvSpPr>
         <p:spPr>
           <a:xfrm>
-            <a:off x="3806952" y="1143000"/>
-            <a:ext cx="3075432" cy="2788920"/>
-          </a:xfrm>
-          <a:prstGeom prst="roundRect">
-            <a:avLst>
-              <a:gd name="adj" fmla="val 3934"/>
-            </a:avLst>
-          </a:prstGeom>
-          <a:solidFill>
-            <a:schemeClr val="bg2"/>
-          </a:solidFill>
-          <a:ln w="12700">
+            <a:off x="1232627" y="1682496"/>
+            <a:ext cx="1672406" cy="923544"/>
+          </a:xfrm>
+          <a:prstGeom prst="rect">
+            <a:avLst/>
+          </a:prstGeom>
+          <a:solidFill>
+            <a:schemeClr val="bg1"/>
+          </a:solidFill>
+          <a:ln w="9525">
             <a:solidFill>
-              <a:schemeClr val="bg2"/>
+              <a:srgbClr val="D6D0CA"/>
             </a:solidFill>
             <a:prstDash val="solid"/>
           </a:ln>
         </p:spPr>
       </p:sp>
-      <p:sp>
-        <p:nvSpPr>
-          <p:cNvPr id="9" name="case2-icon-bg"/>
-          <p:cNvSpPr/>
-          <p:nvPr/>
-        </p:nvSpPr>
-        <p:spPr>
-          <a:xfrm>
-            <a:off x="4008120" y="1344168"/>
-            <a:ext cx="475488" cy="475488"/>
-          </a:xfrm>
-          <a:prstGeom prst="ellipse">
-            <a:avLst/>
-          </a:prstGeom>
-          <a:solidFill>
-            <a:schemeClr val="accent6"/>
-          </a:solidFill>
-          <a:ln w="12700">
-            <a:solidFill>
-              <a:schemeClr val="accent6"/>
-            </a:solidFill>
-            <a:prstDash val="solid"/>
-          </a:ln>
-        </p:spPr>
-      </p:sp>
       <p:pic>
         <p:nvPicPr>
-          <p:cNvPr id="10" name="case2-icon" descr="決済できなかった">    </p:cNvPr>
+          <p:cNvPr id="8" name="case1-screen" descr="case1-screen">    </p:cNvPr>
           <p:cNvPicPr>
             <a:picLocks noChangeAspect="1"/>
           </p:cNvPicPr>
@@ -3503,8 +3525,8 @@
         </p:blipFill>
         <p:spPr>
           <a:xfrm>
-            <a:off x="4099560" y="1435608"/>
-            <a:ext cx="292608" cy="292608"/>
+            <a:off x="1260059" y="1709928"/>
+            <a:ext cx="1617542" cy="868680"/>
           </a:xfrm>
           <a:prstGeom prst="rect">
             <a:avLst/>
@@ -3513,14 +3535,14 @@
       </p:pic>
       <p:sp>
         <p:nvSpPr>
-          <p:cNvPr id="11" name="case2-title"/>
+          <p:cNvPr id="9" name="case1-caption"/>
           <p:cNvSpPr txBox="1"/>
           <p:nvPr/>
         </p:nvSpPr>
         <p:spPr>
           <a:xfrm>
-            <a:off x="4611624" y="1344168"/>
-            <a:ext cx="2115312" cy="475488"/>
+            <a:off x="640080" y="2651760"/>
+            <a:ext cx="2857500" cy="201168"/>
           </a:xfrm>
           <a:prstGeom prst="rect">
             <a:avLst/>
@@ -3532,31 +3554,31 @@
           <a:bodyPr wrap="square" lIns="0" tIns="0" rIns="0" bIns="0" rtlCol="0" anchor="ctr"/>
           <a:lstStyle/>
           <a:p>
-            <a:pPr indent="0" marL="0">
+            <a:pPr algn="ctr" indent="0" marL="0">
               <a:buNone/>
             </a:pPr>
             <a:r>
-              <a:rPr lang="ja-JP" altLang="en-US" sz="1600" b="1" dirty="0">
-                <a:solidFill>
-                  <a:schemeClr val="tx1"/>
-                </a:solidFill>
-              </a:rPr>
-              <a:t>決済できなかった</a:t>
-            </a:r>
-            <a:endParaRPr lang="ja-JP" sz="1600" dirty="0"/>
-          </a:p>
-        </p:txBody>
-      </p:sp>
-      <p:sp>
-        <p:nvSpPr>
-          <p:cNvPr id="12" name="case2-body"/>
+              <a:rPr lang="ja-JP" altLang="en-US" sz="950" dirty="0">
+                <a:solidFill>
+                  <a:srgbClr val="57534E"/>
+                </a:solidFill>
+              </a:rPr>
+              <a:t>お客さんが端末で「割り勘」を選ぶと出る画面</a:t>
+            </a:r>
+            <a:endParaRPr lang="ja-JP" sz="950" dirty="0"/>
+          </a:p>
+        </p:txBody>
+      </p:sp>
+      <p:sp>
+        <p:nvSpPr>
+          <p:cNvPr id="10" name="case1-steps"/>
           <p:cNvSpPr txBox="1"/>
           <p:nvPr/>
         </p:nvSpPr>
         <p:spPr>
           <a:xfrm>
-            <a:off x="4008120" y="1984248"/>
-            <a:ext cx="2673096" cy="1828800"/>
+            <a:off x="640080" y="2926080"/>
+            <a:ext cx="2857500" cy="908304"/>
           </a:xfrm>
           <a:prstGeom prst="rect">
             <a:avLst/>
@@ -3568,83 +3590,83 @@
           <a:bodyPr wrap="square" lIns="0" tIns="0" rIns="0" bIns="0" rtlCol="0" anchor="t"/>
           <a:lstStyle/>
           <a:p>
-            <a:pPr marL="177800" indent="-177800">
+            <a:pPr indent="0" marL="0">
               <a:spcAft>
                 <a:spcPts val="400"/>
               </a:spcAft>
-              <a:buSzPct val="100000"/>
-              <a:buChar char="•"/>
-            </a:pPr>
-            <a:r>
-              <a:rPr lang="ja-JP" altLang="en-US" sz="1300" dirty="0">
-                <a:solidFill>
-                  <a:schemeClr val="tx1"/>
-                </a:solidFill>
-              </a:rPr>
-              <a:t>「決済できませんでした」→ お金は</a:t>
-            </a:r>
-            <a:r>
-              <a:rPr lang="ja-JP" altLang="en-US" sz="1300" b="1" dirty="0">
-                <a:solidFill>
-                  <a:schemeClr val="tx1"/>
-                </a:solidFill>
-              </a:rPr>
-              <a:t>受け取っていない</a:t>
-            </a:r>
-            <a:endParaRPr lang="ja-JP" sz="1300" dirty="0"/>
-          </a:p>
-          <a:p>
-            <a:pPr marL="177800" indent="-177800">
+              <a:buNone/>
+            </a:pPr>
+            <a:r>
+              <a:rPr lang="ja-JP" altLang="en-US" sz="1150" dirty="0">
+                <a:solidFill>
+                  <a:schemeClr val="tx1"/>
+                </a:solidFill>
+              </a:rPr>
+              <a:t>① 商品で分ける →「個別小計」</a:t>
+            </a:r>
+            <a:endParaRPr lang="ja-JP" sz="1150" dirty="0"/>
+          </a:p>
+          <a:p>
+            <a:pPr indent="0" marL="0">
               <a:spcAft>
                 <a:spcPts val="400"/>
               </a:spcAft>
-              <a:buSzPct val="100000"/>
-              <a:buChar char="•"/>
-            </a:pPr>
-            <a:r>
-              <a:rPr lang="ja-JP" altLang="en-US" sz="1300" dirty="0">
-                <a:solidFill>
-                  <a:schemeClr val="tx1"/>
-                </a:solidFill>
-              </a:rPr>
-              <a:t>「もう一度送る」か、「閉じる」→ 現金で受け取る</a:t>
-            </a:r>
-            <a:endParaRPr lang="ja-JP" sz="1300" dirty="0"/>
-          </a:p>
-          <a:p>
-            <a:pPr marL="177800" indent="-177800">
+              <a:buNone/>
+            </a:pPr>
+            <a:r>
+              <a:rPr lang="ja-JP" altLang="en-US" sz="1150" dirty="0">
+                <a:solidFill>
+                  <a:schemeClr val="tx1"/>
+                </a:solidFill>
+              </a:rPr>
+              <a:t>② 金額で分ける →「小計分割・一部金額先払い」</a:t>
+            </a:r>
+            <a:endParaRPr lang="ja-JP" sz="1150" dirty="0"/>
+          </a:p>
+          <a:p>
+            <a:pPr indent="0" marL="0">
               <a:spcAft>
                 <a:spcPts val="400"/>
               </a:spcAft>
-              <a:buSzPct val="100000"/>
-              <a:buChar char="•"/>
-            </a:pPr>
-            <a:r>
-              <a:rPr lang="ja-JP" altLang="en-US" sz="1300" dirty="0">
-                <a:solidFill>
-                  <a:schemeClr val="tx1"/>
-                </a:solidFill>
-              </a:rPr>
-              <a:t>残高が足りないときは「一部金額を先払い」</a:t>
-            </a:r>
-            <a:endParaRPr lang="ja-JP" sz="1300" dirty="0"/>
-          </a:p>
-        </p:txBody>
-      </p:sp>
-      <p:sp>
-        <p:nvSpPr>
-          <p:cNvPr id="13" name="case3"/>
+              <a:buNone/>
+            </a:pPr>
+            <a:r>
+              <a:rPr lang="ja-JP" altLang="en-US" sz="1150" dirty="0">
+                <a:solidFill>
+                  <a:schemeClr val="tx1"/>
+                </a:solidFill>
+              </a:rPr>
+              <a:t>③ 最後は「会計しました」で </a:t>
+            </a:r>
+            <a:r>
+              <a:rPr lang="ja-JP" altLang="en-US" sz="1150" b="1" dirty="0">
+                <a:solidFill>
+                  <a:schemeClr val="tx1"/>
+                </a:solidFill>
+                <a:highlight>
+                  <a:srgbClr val="E7E5E4"/>
+                </a:highlight>
+              </a:rPr>
+              <a:t> Enter </a:t>
+            </a:r>
+            <a:endParaRPr lang="ja-JP" sz="1150" dirty="0"/>
+          </a:p>
+        </p:txBody>
+      </p:sp>
+      <p:sp>
+        <p:nvSpPr>
+          <p:cNvPr id="11" name="case2"/>
           <p:cNvSpPr/>
           <p:nvPr/>
         </p:nvSpPr>
         <p:spPr>
           <a:xfrm>
-            <a:off x="7156704" y="1143000"/>
-            <a:ext cx="3075432" cy="2788920"/>
+            <a:off x="3881628" y="1051560"/>
+            <a:ext cx="3223260" cy="2892552"/>
           </a:xfrm>
           <a:prstGeom prst="roundRect">
             <a:avLst>
-              <a:gd name="adj" fmla="val 3934"/>
+              <a:gd name="adj" fmla="val 3161"/>
             </a:avLst>
           </a:prstGeom>
           <a:solidFill>
@@ -3660,14 +3682,14 @@
       </p:sp>
       <p:sp>
         <p:nvSpPr>
-          <p:cNvPr id="14" name="case3-icon-bg"/>
+          <p:cNvPr id="12" name="case2-icon-bg"/>
           <p:cNvSpPr/>
           <p:nvPr/>
         </p:nvSpPr>
         <p:spPr>
           <a:xfrm>
-            <a:off x="7357872" y="1344168"/>
-            <a:ext cx="475488" cy="475488"/>
+            <a:off x="4046220" y="1197864"/>
+            <a:ext cx="402336" cy="402336"/>
           </a:xfrm>
           <a:prstGeom prst="ellipse">
             <a:avLst/>
@@ -3685,7 +3707,7 @@
       </p:sp>
       <p:pic>
         <p:nvPicPr>
-          <p:cNvPr id="15" name="case3-icon" descr="払ったのに送れない">    </p:cNvPr>
+          <p:cNvPr id="13" name="case2-icon" descr="決済できなかった">    </p:cNvPr>
           <p:cNvPicPr>
             <a:picLocks noChangeAspect="1"/>
           </p:cNvPicPr>
@@ -3699,8 +3721,8 @@
         </p:blipFill>
         <p:spPr>
           <a:xfrm>
-            <a:off x="7449312" y="1435608"/>
-            <a:ext cx="292608" cy="292608"/>
+            <a:off x="4119372" y="1271016"/>
+            <a:ext cx="256032" cy="256032"/>
           </a:xfrm>
           <a:prstGeom prst="rect">
             <a:avLst/>
@@ -3709,14 +3731,14 @@
       </p:pic>
       <p:sp>
         <p:nvSpPr>
-          <p:cNvPr id="16" name="case3-title"/>
+          <p:cNvPr id="14" name="case2-title"/>
           <p:cNvSpPr txBox="1"/>
           <p:nvPr/>
         </p:nvSpPr>
         <p:spPr>
           <a:xfrm>
-            <a:off x="7961376" y="1344168"/>
-            <a:ext cx="2115312" cy="475488"/>
+            <a:off x="4558284" y="1197864"/>
+            <a:ext cx="2400300" cy="402336"/>
           </a:xfrm>
           <a:prstGeom prst="rect">
             <a:avLst/>
@@ -3732,156 +3754,45 @@
               <a:buNone/>
             </a:pPr>
             <a:r>
-              <a:rPr lang="ja-JP" altLang="en-US" sz="1600" b="1" dirty="0">
-                <a:solidFill>
-                  <a:schemeClr val="tx1"/>
-                </a:solidFill>
-              </a:rPr>
-              <a:t>払ったのに送れない</a:t>
-            </a:r>
-            <a:endParaRPr lang="ja-JP" sz="1600" dirty="0"/>
-          </a:p>
-        </p:txBody>
-      </p:sp>
-      <p:sp>
-        <p:nvSpPr>
-          <p:cNvPr id="17" name="case3-body"/>
-          <p:cNvSpPr txBox="1"/>
-          <p:nvPr/>
-        </p:nvSpPr>
-        <p:spPr>
-          <a:xfrm>
-            <a:off x="7357872" y="1984248"/>
-            <a:ext cx="2673096" cy="1828800"/>
-          </a:xfrm>
-          <a:prstGeom prst="rect">
-            <a:avLst/>
-          </a:prstGeom>
-          <a:noFill/>
-          <a:ln/>
-        </p:spPr>
-        <p:txBody>
-          <a:bodyPr wrap="square" lIns="0" tIns="0" rIns="0" bIns="0" rtlCol="0" anchor="t"/>
-          <a:lstStyle/>
-          <a:p>
-            <a:pPr marL="177800" indent="-177800">
-              <a:spcAft>
-                <a:spcPts val="400"/>
-              </a:spcAft>
-              <a:buSzPct val="100000"/>
-              <a:buChar char="•"/>
-            </a:pPr>
-            <a:r>
-              <a:rPr lang="ja-JP" altLang="en-US" sz="1300" dirty="0">
-                <a:solidFill>
-                  <a:schemeClr val="tx1"/>
-                </a:solidFill>
-              </a:rPr>
-              <a:t>「お金は受け取っています」と出たら、</a:t>
-            </a:r>
-            <a:r>
-              <a:rPr lang="ja-JP" altLang="en-US" sz="1300" b="1" dirty="0">
-                <a:solidFill>
-                  <a:schemeClr val="tx1"/>
-                </a:solidFill>
-              </a:rPr>
-              <a:t>現金で取り直さない</a:t>
-            </a:r>
-            <a:endParaRPr lang="ja-JP" sz="1300" dirty="0"/>
-          </a:p>
-          <a:p>
-            <a:pPr marL="177800" indent="-177800">
-              <a:spcAft>
-                <a:spcPts val="400"/>
-              </a:spcAft>
-              <a:buSzPct val="100000"/>
-              <a:buChar char="•"/>
-            </a:pPr>
-            <a:r>
-              <a:rPr lang="ja-JP" altLang="en-US" sz="1300" dirty="0">
-                <a:solidFill>
-                  <a:schemeClr val="tx1"/>
-                </a:solidFill>
-              </a:rPr>
-              <a:t>「注文を送信」を押す</a:t>
-            </a:r>
-            <a:endParaRPr lang="ja-JP" sz="1300" dirty="0"/>
-          </a:p>
-          <a:p>
-            <a:pPr marL="177800" indent="-177800">
-              <a:spcAft>
-                <a:spcPts val="400"/>
-              </a:spcAft>
-              <a:buSzPct val="100000"/>
-              <a:buChar char="•"/>
-            </a:pPr>
-            <a:r>
-              <a:rPr lang="ja-JP" altLang="en-US" sz="1300" dirty="0">
-                <a:solidFill>
-                  <a:schemeClr val="tx1"/>
-                </a:solidFill>
-              </a:rPr>
-              <a:t>送れないときは、右上の「未登録の Square 決済」から登録</a:t>
-            </a:r>
-            <a:endParaRPr lang="ja-JP" sz="1300" dirty="0"/>
-          </a:p>
-        </p:txBody>
-      </p:sp>
-      <p:sp>
-        <p:nvSpPr>
-          <p:cNvPr id="18" name="case4"/>
+              <a:rPr lang="ja-JP" altLang="en-US" sz="1500" b="1" dirty="0">
+                <a:solidFill>
+                  <a:schemeClr val="tx1"/>
+                </a:solidFill>
+              </a:rPr>
+              <a:t>決済できなかった</a:t>
+            </a:r>
+            <a:endParaRPr lang="ja-JP" sz="1500" dirty="0"/>
+          </a:p>
+        </p:txBody>
+      </p:sp>
+      <p:sp>
+        <p:nvSpPr>
+          <p:cNvPr id="15" name="case2-screen-frame"/>
           <p:cNvSpPr/>
           <p:nvPr/>
         </p:nvSpPr>
         <p:spPr>
           <a:xfrm>
-            <a:off x="457200" y="4206240"/>
-            <a:ext cx="3075432" cy="2788920"/>
-          </a:xfrm>
-          <a:prstGeom prst="roundRect">
-            <a:avLst>
-              <a:gd name="adj" fmla="val 3934"/>
-            </a:avLst>
-          </a:prstGeom>
-          <a:solidFill>
-            <a:schemeClr val="bg2"/>
-          </a:solidFill>
-          <a:ln w="12700">
+            <a:off x="4387788" y="1682496"/>
+            <a:ext cx="2210940" cy="923544"/>
+          </a:xfrm>
+          <a:prstGeom prst="rect">
+            <a:avLst/>
+          </a:prstGeom>
+          <a:solidFill>
+            <a:schemeClr val="bg1"/>
+          </a:solidFill>
+          <a:ln w="9525">
             <a:solidFill>
-              <a:schemeClr val="bg2"/>
+              <a:srgbClr val="D6D0CA"/>
             </a:solidFill>
             <a:prstDash val="solid"/>
           </a:ln>
         </p:spPr>
       </p:sp>
-      <p:sp>
-        <p:nvSpPr>
-          <p:cNvPr id="19" name="case4-icon-bg"/>
-          <p:cNvSpPr/>
-          <p:nvPr/>
-        </p:nvSpPr>
-        <p:spPr>
-          <a:xfrm>
-            <a:off x="658368" y="4407408"/>
-            <a:ext cx="475488" cy="475488"/>
-          </a:xfrm>
-          <a:prstGeom prst="ellipse">
-            <a:avLst/>
-          </a:prstGeom>
-          <a:solidFill>
-            <a:srgbClr val="57534E"/>
-          </a:solidFill>
-          <a:ln w="12700">
-            <a:solidFill>
-              <a:srgbClr val="57534E"/>
-            </a:solidFill>
-            <a:prstDash val="solid"/>
-          </a:ln>
-        </p:spPr>
-      </p:sp>
       <p:pic>
         <p:nvPicPr>
-          <p:cNvPr id="20" name="case4-icon" descr="入力をやめる・直す">    </p:cNvPr>
+          <p:cNvPr id="16" name="case2-screen" descr="case2-screen">    </p:cNvPr>
           <p:cNvPicPr>
             <a:picLocks noChangeAspect="1"/>
           </p:cNvPicPr>
@@ -3895,8 +3806,8 @@
         </p:blipFill>
         <p:spPr>
           <a:xfrm>
-            <a:off x="749808" y="4498848"/>
-            <a:ext cx="292608" cy="292608"/>
+            <a:off x="4415220" y="1709928"/>
+            <a:ext cx="2156076" cy="868680"/>
           </a:xfrm>
           <a:prstGeom prst="rect">
             <a:avLst/>
@@ -3905,14 +3816,14 @@
       </p:pic>
       <p:sp>
         <p:nvSpPr>
-          <p:cNvPr id="21" name="case4-title"/>
+          <p:cNvPr id="17" name="case2-steps"/>
           <p:cNvSpPr txBox="1"/>
           <p:nvPr/>
         </p:nvSpPr>
         <p:spPr>
           <a:xfrm>
-            <a:off x="1261872" y="4407408"/>
-            <a:ext cx="2115312" cy="475488"/>
+            <a:off x="4064508" y="2743200"/>
+            <a:ext cx="2857500" cy="1091184"/>
           </a:xfrm>
           <a:prstGeom prst="rect">
             <a:avLst/>
@@ -3921,190 +3832,83 @@
           <a:ln/>
         </p:spPr>
         <p:txBody>
-          <a:bodyPr wrap="square" lIns="0" tIns="0" rIns="0" bIns="0" rtlCol="0" anchor="ctr"/>
-          <a:lstStyle/>
-          <a:p>
-            <a:pPr indent="0" marL="0">
-              <a:buNone/>
-            </a:pPr>
-            <a:r>
-              <a:rPr lang="ja-JP" altLang="en-US" sz="1600" b="1" dirty="0">
-                <a:solidFill>
-                  <a:schemeClr val="tx1"/>
-                </a:solidFill>
-              </a:rPr>
-              <a:t>入力をやめる・直す</a:t>
-            </a:r>
-            <a:endParaRPr lang="ja-JP" sz="1600" dirty="0"/>
-          </a:p>
-        </p:txBody>
-      </p:sp>
-      <p:sp>
-        <p:nvSpPr>
-          <p:cNvPr id="22" name="case4-body"/>
-          <p:cNvSpPr txBox="1"/>
-          <p:nvPr/>
-        </p:nvSpPr>
-        <p:spPr>
-          <a:xfrm>
-            <a:off x="658368" y="5047488"/>
-            <a:ext cx="2673096" cy="1828800"/>
-          </a:xfrm>
-          <a:prstGeom prst="rect">
-            <a:avLst/>
-          </a:prstGeom>
-          <a:noFill/>
-          <a:ln/>
-        </p:spPr>
-        <p:txBody>
           <a:bodyPr wrap="square" lIns="0" tIns="0" rIns="0" bIns="0" rtlCol="0" anchor="t"/>
           <a:lstStyle/>
           <a:p>
-            <a:pPr marL="177800" indent="-177800">
+            <a:pPr indent="0" marL="0">
               <a:spcAft>
                 <a:spcPts val="400"/>
               </a:spcAft>
-              <a:buSzPct val="100000"/>
-              <a:buChar char="•"/>
-            </a:pPr>
-            <a:r>
-              <a:rPr lang="ja-JP" altLang="en-US" sz="1300" dirty="0">
-                <a:solidFill>
-                  <a:schemeClr val="tx1"/>
-                </a:solidFill>
-              </a:rPr>
-              <a:t>1 行消す：</a:t>
-            </a:r>
-            <a:r>
-              <a:rPr lang="ja-JP" altLang="en-US" sz="1300" b="1" dirty="0">
-                <a:solidFill>
-                  <a:schemeClr val="tx1"/>
-                </a:solidFill>
-                <a:highlight>
-                  <a:srgbClr val="E7E5E4"/>
-                </a:highlight>
-                <a:latin typeface="Yu Gothic" pitchFamily="34" charset="0"/>
-                <a:ea typeface="Yu Gothic" pitchFamily="34" charset="-122"/>
-                <a:cs typeface="Yu Gothic" pitchFamily="34" charset="-120"/>
-              </a:rPr>
-              <a:t> Backspace </a:t>
-            </a:r>
-            <a:endParaRPr lang="ja-JP" sz="1300" dirty="0"/>
-          </a:p>
-          <a:p>
-            <a:pPr marL="177800" indent="-177800">
+              <a:buNone/>
+            </a:pPr>
+            <a:r>
+              <a:rPr lang="ja-JP" altLang="en-US" sz="1150" dirty="0">
+                <a:solidFill>
+                  <a:schemeClr val="tx1"/>
+                </a:solidFill>
+              </a:rPr>
+              <a:t>① お金は</a:t>
+            </a:r>
+            <a:r>
+              <a:rPr lang="ja-JP" altLang="en-US" sz="1150" b="1" dirty="0">
+                <a:solidFill>
+                  <a:schemeClr val="tx1"/>
+                </a:solidFill>
+              </a:rPr>
+              <a:t>受け取っていない</a:t>
+            </a:r>
+            <a:endParaRPr lang="ja-JP" sz="1150" dirty="0"/>
+          </a:p>
+          <a:p>
+            <a:pPr indent="0" marL="0">
               <a:spcAft>
                 <a:spcPts val="400"/>
               </a:spcAft>
-              <a:buSzPct val="100000"/>
-              <a:buChar char="•"/>
-            </a:pPr>
-            <a:r>
-              <a:rPr lang="ja-JP" altLang="en-US" sz="1300" dirty="0">
-                <a:solidFill>
-                  <a:schemeClr val="tx1"/>
-                </a:solidFill>
-              </a:rPr>
-              <a:t>全部消す：</a:t>
-            </a:r>
-            <a:r>
-              <a:rPr lang="ja-JP" altLang="en-US" sz="1300" b="1" dirty="0">
-                <a:solidFill>
-                  <a:schemeClr val="tx1"/>
-                </a:solidFill>
-                <a:highlight>
-                  <a:srgbClr val="E7E5E4"/>
-                </a:highlight>
-                <a:latin typeface="Yu Gothic" pitchFamily="34" charset="0"/>
-                <a:ea typeface="Yu Gothic" pitchFamily="34" charset="-122"/>
-                <a:cs typeface="Yu Gothic" pitchFamily="34" charset="-120"/>
-              </a:rPr>
-              <a:t> Esc </a:t>
-            </a:r>
-            <a:r>
-              <a:rPr lang="ja-JP" altLang="en-US" sz="1300" dirty="0">
-                <a:solidFill>
-                  <a:schemeClr val="tx1"/>
-                </a:solidFill>
-              </a:rPr>
-              <a:t> →「消す」</a:t>
-            </a:r>
-            <a:endParaRPr lang="ja-JP" sz="1300" dirty="0"/>
-          </a:p>
-          <a:p>
-            <a:pPr marL="177800" indent="-177800">
+              <a:buNone/>
+            </a:pPr>
+            <a:r>
+              <a:rPr lang="ja-JP" altLang="en-US" sz="1150" dirty="0">
+                <a:solidFill>
+                  <a:schemeClr val="tx1"/>
+                </a:solidFill>
+              </a:rPr>
+              <a:t>② 「もう一度送る」か「閉じる」→ 現金</a:t>
+            </a:r>
+            <a:endParaRPr lang="ja-JP" sz="1150" dirty="0"/>
+          </a:p>
+          <a:p>
+            <a:pPr indent="0" marL="0">
               <a:spcAft>
                 <a:spcPts val="400"/>
               </a:spcAft>
-              <a:buSzPct val="100000"/>
-              <a:buChar char="•"/>
-            </a:pPr>
-            <a:r>
-              <a:rPr lang="ja-JP" altLang="en-US" sz="1300" dirty="0">
-                <a:solidFill>
-                  <a:schemeClr val="tx1"/>
-                </a:solidFill>
-              </a:rPr>
-              <a:t>会計中は </a:t>
-            </a:r>
-            <a:r>
-              <a:rPr lang="ja-JP" altLang="en-US" sz="1300" b="1" dirty="0">
-                <a:solidFill>
-                  <a:schemeClr val="tx1"/>
-                </a:solidFill>
-                <a:highlight>
-                  <a:srgbClr val="E7E5E4"/>
-                </a:highlight>
-                <a:latin typeface="Yu Gothic" pitchFamily="34" charset="0"/>
-                <a:ea typeface="Yu Gothic" pitchFamily="34" charset="-122"/>
-                <a:cs typeface="Yu Gothic" pitchFamily="34" charset="-120"/>
-              </a:rPr>
-              <a:t> Esc </a:t>
-            </a:r>
-            <a:r>
-              <a:rPr lang="ja-JP" altLang="en-US" sz="1300" dirty="0">
-                <a:solidFill>
-                  <a:schemeClr val="tx1"/>
-                </a:solidFill>
-              </a:rPr>
-              <a:t> で会計取消</a:t>
-            </a:r>
-            <a:endParaRPr lang="ja-JP" sz="1300" dirty="0"/>
-          </a:p>
-          <a:p>
-            <a:pPr marL="177800" indent="-177800">
-              <a:spcAft>
-                <a:spcPts val="400"/>
-              </a:spcAft>
-              <a:buSzPct val="100000"/>
-              <a:buChar char="•"/>
-            </a:pPr>
-            <a:r>
-              <a:rPr lang="ja-JP" altLang="en-US" sz="1300" dirty="0">
-                <a:solidFill>
-                  <a:schemeClr val="tx1"/>
-                </a:solidFill>
-              </a:rPr>
-              <a:t>先払いがあるときは「先払いを取り消す」で返金してから</a:t>
-            </a:r>
-            <a:endParaRPr lang="ja-JP" sz="1300" dirty="0"/>
-          </a:p>
-        </p:txBody>
-      </p:sp>
-      <p:sp>
-        <p:nvSpPr>
-          <p:cNvPr id="23" name="case5"/>
+              <a:buNone/>
+            </a:pPr>
+            <a:r>
+              <a:rPr lang="ja-JP" altLang="en-US" sz="1150" dirty="0">
+                <a:solidFill>
+                  <a:schemeClr val="tx1"/>
+                </a:solidFill>
+              </a:rPr>
+              <a:t>③ 残高不足は「一部金額を先払い」</a:t>
+            </a:r>
+            <a:endParaRPr lang="ja-JP" sz="1150" dirty="0"/>
+          </a:p>
+        </p:txBody>
+      </p:sp>
+      <p:sp>
+        <p:nvSpPr>
+          <p:cNvPr id="18" name="case3"/>
           <p:cNvSpPr/>
           <p:nvPr/>
         </p:nvSpPr>
         <p:spPr>
           <a:xfrm>
-            <a:off x="3806952" y="4206240"/>
-            <a:ext cx="3075432" cy="2788920"/>
+            <a:off x="457200" y="4145280"/>
+            <a:ext cx="3223260" cy="2892552"/>
           </a:xfrm>
           <a:prstGeom prst="roundRect">
             <a:avLst>
-              <a:gd name="adj" fmla="val 3934"/>
+              <a:gd name="adj" fmla="val 3161"/>
             </a:avLst>
           </a:prstGeom>
           <a:solidFill>
@@ -4120,24 +3924,24 @@
       </p:sp>
       <p:sp>
         <p:nvSpPr>
-          <p:cNvPr id="24" name="case5-icon-bg"/>
+          <p:cNvPr id="19" name="case3-icon-bg"/>
           <p:cNvSpPr/>
           <p:nvPr/>
         </p:nvSpPr>
         <p:spPr>
           <a:xfrm>
-            <a:off x="4008120" y="4407408"/>
-            <a:ext cx="475488" cy="475488"/>
+            <a:off x="621792" y="4291584"/>
+            <a:ext cx="402336" cy="402336"/>
           </a:xfrm>
           <a:prstGeom prst="ellipse">
             <a:avLst/>
           </a:prstGeom>
           <a:solidFill>
-            <a:schemeClr val="accent2"/>
+            <a:schemeClr val="accent6"/>
           </a:solidFill>
           <a:ln w="12700">
             <a:solidFill>
-              <a:schemeClr val="accent2"/>
+              <a:schemeClr val="accent6"/>
             </a:solidFill>
             <a:prstDash val="solid"/>
           </a:ln>
@@ -4145,7 +3949,7 @@
       </p:sp>
       <p:pic>
         <p:nvPicPr>
-          <p:cNvPr id="25" name="case5-icon" descr="オフライン">    </p:cNvPr>
+          <p:cNvPr id="20" name="case3-icon" descr="払ったのに送れない">    </p:cNvPr>
           <p:cNvPicPr>
             <a:picLocks noChangeAspect="1"/>
           </p:cNvPicPr>
@@ -4159,8 +3963,8 @@
         </p:blipFill>
         <p:spPr>
           <a:xfrm>
-            <a:off x="4099560" y="4498848"/>
-            <a:ext cx="292608" cy="292608"/>
+            <a:off x="694944" y="4364736"/>
+            <a:ext cx="256032" cy="256032"/>
           </a:xfrm>
           <a:prstGeom prst="rect">
             <a:avLst/>
@@ -4169,14 +3973,14 @@
       </p:pic>
       <p:sp>
         <p:nvSpPr>
-          <p:cNvPr id="26" name="case5-title"/>
+          <p:cNvPr id="21" name="case3-title"/>
           <p:cNvSpPr txBox="1"/>
           <p:nvPr/>
         </p:nvSpPr>
         <p:spPr>
           <a:xfrm>
-            <a:off x="4611624" y="4407408"/>
-            <a:ext cx="2115312" cy="475488"/>
+            <a:off x="1133856" y="4291584"/>
+            <a:ext cx="2400300" cy="402336"/>
           </a:xfrm>
           <a:prstGeom prst="rect">
             <a:avLst/>
@@ -4192,166 +3996,45 @@
               <a:buNone/>
             </a:pPr>
             <a:r>
-              <a:rPr lang="ja-JP" altLang="en-US" sz="1600" b="1" dirty="0">
-                <a:solidFill>
-                  <a:schemeClr val="tx1"/>
-                </a:solidFill>
-              </a:rPr>
-              <a:t>オフライン</a:t>
-            </a:r>
-            <a:endParaRPr lang="ja-JP" sz="1600" dirty="0"/>
-          </a:p>
-        </p:txBody>
-      </p:sp>
-      <p:sp>
-        <p:nvSpPr>
-          <p:cNvPr id="27" name="case5-body"/>
-          <p:cNvSpPr txBox="1"/>
-          <p:nvPr/>
-        </p:nvSpPr>
-        <p:spPr>
-          <a:xfrm>
-            <a:off x="4008120" y="5047488"/>
-            <a:ext cx="2673096" cy="1828800"/>
-          </a:xfrm>
-          <a:prstGeom prst="rect">
-            <a:avLst/>
-          </a:prstGeom>
-          <a:noFill/>
-          <a:ln/>
-        </p:spPr>
-        <p:txBody>
-          <a:bodyPr wrap="square" lIns="0" tIns="0" rIns="0" bIns="0" rtlCol="0" anchor="t"/>
-          <a:lstStyle/>
-          <a:p>
-            <a:pPr marL="177800" indent="-177800">
-              <a:spcAft>
-                <a:spcPts val="400"/>
-              </a:spcAft>
-              <a:buSzPct val="100000"/>
-              <a:buChar char="•"/>
-            </a:pPr>
-            <a:r>
-              <a:rPr lang="ja-JP" altLang="en-US" sz="1300" dirty="0">
-                <a:solidFill>
-                  <a:schemeClr val="tx1"/>
-                </a:solidFill>
-              </a:rPr>
-              <a:t>上の帯が赤・番号の横に「オフライン」</a:t>
-            </a:r>
-            <a:endParaRPr lang="ja-JP" sz="1300" dirty="0"/>
-          </a:p>
-          <a:p>
-            <a:pPr marL="177800" indent="-177800">
-              <a:spcAft>
-                <a:spcPts val="400"/>
-              </a:spcAft>
-              <a:buSzPct val="100000"/>
-              <a:buChar char="•"/>
-            </a:pPr>
-            <a:r>
-              <a:rPr lang="ja-JP" altLang="en-US" sz="1300" dirty="0">
-                <a:solidFill>
-                  <a:schemeClr val="tx1"/>
-                </a:solidFill>
-              </a:rPr>
-              <a:t>「No.」を押して番号を付けると確定できる</a:t>
-            </a:r>
-            <a:endParaRPr lang="ja-JP" sz="1300" dirty="0"/>
-          </a:p>
-          <a:p>
-            <a:pPr marL="177800" indent="-177800">
-              <a:spcAft>
-                <a:spcPts val="400"/>
-              </a:spcAft>
-              <a:buSzPct val="100000"/>
-              <a:buChar char="•"/>
-            </a:pPr>
-            <a:r>
-              <a:rPr lang="ja-JP" altLang="en-US" sz="1300" dirty="0">
-                <a:solidFill>
-                  <a:schemeClr val="tx1"/>
-                </a:solidFill>
-              </a:rPr>
-              <a:t>現金のみ（Square 不可）</a:t>
-            </a:r>
-            <a:endParaRPr lang="ja-JP" sz="1300" dirty="0"/>
-          </a:p>
-          <a:p>
-            <a:pPr marL="177800" indent="-177800">
-              <a:spcAft>
-                <a:spcPts val="400"/>
-              </a:spcAft>
-              <a:buSzPct val="100000"/>
-              <a:buChar char="•"/>
-            </a:pPr>
-            <a:r>
-              <a:rPr lang="ja-JP" altLang="en-US" sz="1300" b="1" dirty="0">
-                <a:solidFill>
-                  <a:schemeClr val="tx1"/>
-                </a:solidFill>
-              </a:rPr>
-              <a:t>復旧後は必ず「自動に戻す」</a:t>
-            </a:r>
-            <a:endParaRPr lang="ja-JP" sz="1300" dirty="0"/>
-          </a:p>
-        </p:txBody>
-      </p:sp>
-      <p:sp>
-        <p:nvSpPr>
-          <p:cNvPr id="28" name="case6"/>
+              <a:rPr lang="ja-JP" altLang="en-US" sz="1500" b="1" dirty="0">
+                <a:solidFill>
+                  <a:schemeClr val="tx1"/>
+                </a:solidFill>
+              </a:rPr>
+              <a:t>払ったのに送れない</a:t>
+            </a:r>
+            <a:endParaRPr lang="ja-JP" sz="1500" dirty="0"/>
+          </a:p>
+        </p:txBody>
+      </p:sp>
+      <p:sp>
+        <p:nvSpPr>
+          <p:cNvPr id="22" name="case3-screen-frame"/>
           <p:cNvSpPr/>
           <p:nvPr/>
         </p:nvSpPr>
         <p:spPr>
           <a:xfrm>
-            <a:off x="7156704" y="4206240"/>
-            <a:ext cx="3075432" cy="2788920"/>
-          </a:xfrm>
-          <a:prstGeom prst="roundRect">
-            <a:avLst>
-              <a:gd name="adj" fmla="val 3934"/>
-            </a:avLst>
-          </a:prstGeom>
-          <a:solidFill>
-            <a:schemeClr val="bg2"/>
-          </a:solidFill>
-          <a:ln w="12700">
+            <a:off x="612648" y="4811835"/>
+            <a:ext cx="2912364" cy="852306"/>
+          </a:xfrm>
+          <a:prstGeom prst="rect">
+            <a:avLst/>
+          </a:prstGeom>
+          <a:solidFill>
+            <a:schemeClr val="bg1"/>
+          </a:solidFill>
+          <a:ln w="9525">
             <a:solidFill>
-              <a:schemeClr val="bg2"/>
+              <a:srgbClr val="D6D0CA"/>
             </a:solidFill>
             <a:prstDash val="solid"/>
           </a:ln>
         </p:spPr>
       </p:sp>
-      <p:sp>
-        <p:nvSpPr>
-          <p:cNvPr id="29" name="case6-icon-bg"/>
-          <p:cNvSpPr/>
-          <p:nvPr/>
-        </p:nvSpPr>
-        <p:spPr>
-          <a:xfrm>
-            <a:off x="7357872" y="4407408"/>
-            <a:ext cx="475488" cy="475488"/>
-          </a:xfrm>
-          <a:prstGeom prst="ellipse">
-            <a:avLst/>
-          </a:prstGeom>
-          <a:solidFill>
-            <a:schemeClr val="accent4"/>
-          </a:solidFill>
-          <a:ln w="12700">
-            <a:solidFill>
-              <a:schemeClr val="accent4"/>
-            </a:solidFill>
-            <a:prstDash val="solid"/>
-          </a:ln>
-        </p:spPr>
-      </p:sp>
       <p:pic>
         <p:nvPicPr>
-          <p:cNvPr id="30" name="case6-icon" descr="印刷されない">    </p:cNvPr>
+          <p:cNvPr id="23" name="case3-screen" descr="case3-screen">    </p:cNvPr>
           <p:cNvPicPr>
             <a:picLocks noChangeAspect="1"/>
           </p:cNvPicPr>
@@ -4365,8 +4048,8 @@
         </p:blipFill>
         <p:spPr>
           <a:xfrm>
-            <a:off x="7449312" y="4498848"/>
-            <a:ext cx="292608" cy="292608"/>
+            <a:off x="640080" y="4839267"/>
+            <a:ext cx="2857500" cy="797442"/>
           </a:xfrm>
           <a:prstGeom prst="rect">
             <a:avLst/>
@@ -4375,14 +4058,14 @@
       </p:pic>
       <p:sp>
         <p:nvSpPr>
-          <p:cNvPr id="31" name="case6-title"/>
+          <p:cNvPr id="24" name="case3-caption"/>
           <p:cNvSpPr txBox="1"/>
           <p:nvPr/>
         </p:nvSpPr>
         <p:spPr>
           <a:xfrm>
-            <a:off x="7961376" y="4407408"/>
-            <a:ext cx="2115312" cy="475488"/>
+            <a:off x="640080" y="5745480"/>
+            <a:ext cx="2857500" cy="201168"/>
           </a:xfrm>
           <a:prstGeom prst="rect">
             <a:avLst/>
@@ -4394,31 +4077,31 @@
           <a:bodyPr wrap="square" lIns="0" tIns="0" rIns="0" bIns="0" rtlCol="0" anchor="ctr"/>
           <a:lstStyle/>
           <a:p>
-            <a:pPr indent="0" marL="0">
+            <a:pPr algn="ctr" indent="0" marL="0">
               <a:buNone/>
             </a:pPr>
             <a:r>
-              <a:rPr lang="ja-JP" altLang="en-US" sz="1600" b="1" dirty="0">
-                <a:solidFill>
-                  <a:schemeClr val="tx1"/>
-                </a:solidFill>
-              </a:rPr>
-              <a:t>印刷されない</a:t>
-            </a:r>
-            <a:endParaRPr lang="ja-JP" sz="1600" dirty="0"/>
-          </a:p>
-        </p:txBody>
-      </p:sp>
-      <p:sp>
-        <p:nvSpPr>
-          <p:cNvPr id="32" name="case6-body"/>
+              <a:rPr lang="ja-JP" altLang="en-US" sz="950" dirty="0">
+                <a:solidFill>
+                  <a:srgbClr val="57534E"/>
+                </a:solidFill>
+              </a:rPr>
+              <a:t>レジの右上に出るボタン</a:t>
+            </a:r>
+            <a:endParaRPr lang="ja-JP" sz="950" dirty="0"/>
+          </a:p>
+        </p:txBody>
+      </p:sp>
+      <p:sp>
+        <p:nvSpPr>
+          <p:cNvPr id="25" name="case3-steps"/>
           <p:cNvSpPr txBox="1"/>
           <p:nvPr/>
         </p:nvSpPr>
         <p:spPr>
           <a:xfrm>
-            <a:off x="7357872" y="5047488"/>
-            <a:ext cx="2673096" cy="1828800"/>
+            <a:off x="640080" y="6019800"/>
+            <a:ext cx="2857500" cy="908304"/>
           </a:xfrm>
           <a:prstGeom prst="rect">
             <a:avLst/>
@@ -4430,71 +4113,850 @@
           <a:bodyPr wrap="square" lIns="0" tIns="0" rIns="0" bIns="0" rtlCol="0" anchor="t"/>
           <a:lstStyle/>
           <a:p>
-            <a:pPr marL="177800" indent="-177800">
+            <a:pPr indent="0" marL="0">
               <a:spcAft>
                 <a:spcPts val="400"/>
               </a:spcAft>
-              <a:buSzPct val="100000"/>
-              <a:buChar char="•"/>
-            </a:pPr>
-            <a:r>
-              <a:rPr lang="ja-JP" altLang="en-US" sz="1300" dirty="0">
-                <a:solidFill>
-                  <a:schemeClr val="tx1"/>
-                </a:solidFill>
-              </a:rPr>
-              <a:t>シール・レシートが出ない → 電源・紙・カバーを確かめる</a:t>
-            </a:r>
-            <a:endParaRPr lang="ja-JP" sz="1300" dirty="0"/>
-          </a:p>
-          <a:p>
-            <a:pPr marL="177800" indent="-177800">
+              <a:buNone/>
+            </a:pPr>
+            <a:r>
+              <a:rPr lang="ja-JP" altLang="en-US" sz="1150" dirty="0">
+                <a:solidFill>
+                  <a:schemeClr val="tx1"/>
+                </a:solidFill>
+              </a:rPr>
+              <a:t>① 「お金は受け取っています」→ </a:t>
+            </a:r>
+            <a:r>
+              <a:rPr lang="ja-JP" altLang="en-US" sz="1150" b="1" dirty="0">
+                <a:solidFill>
+                  <a:schemeClr val="tx1"/>
+                </a:solidFill>
+              </a:rPr>
+              <a:t>現金で取り直さない</a:t>
+            </a:r>
+            <a:endParaRPr lang="ja-JP" sz="1150" dirty="0"/>
+          </a:p>
+          <a:p>
+            <a:pPr indent="0" marL="0">
               <a:spcAft>
                 <a:spcPts val="400"/>
               </a:spcAft>
-              <a:buSzPct val="100000"/>
-              <a:buChar char="•"/>
-            </a:pPr>
-            <a:r>
-              <a:rPr lang="ja-JP" altLang="en-US" sz="1300" dirty="0">
-                <a:solidFill>
-                  <a:schemeClr val="tx1"/>
-                </a:solidFill>
-              </a:rPr>
-              <a:t>「未印刷 N 件」が出たら「もう一度刷る」</a:t>
-            </a:r>
-            <a:endParaRPr lang="ja-JP" sz="1300" dirty="0"/>
-          </a:p>
-          <a:p>
-            <a:pPr marL="177800" indent="-177800">
+              <a:buNone/>
+            </a:pPr>
+            <a:r>
+              <a:rPr lang="ja-JP" altLang="en-US" sz="1150" dirty="0">
+                <a:solidFill>
+                  <a:schemeClr val="tx1"/>
+                </a:solidFill>
+              </a:rPr>
+              <a:t>② 「注文を送信」を押す</a:t>
+            </a:r>
+            <a:endParaRPr lang="ja-JP" sz="1150" dirty="0"/>
+          </a:p>
+          <a:p>
+            <a:pPr indent="0" marL="0">
               <a:spcAft>
                 <a:spcPts val="400"/>
               </a:spcAft>
-              <a:buSzPct val="100000"/>
-              <a:buChar char="•"/>
-            </a:pPr>
-            <a:r>
-              <a:rPr lang="ja-JP" altLang="en-US" sz="1300" dirty="0">
-                <a:solidFill>
-                  <a:schemeClr val="tx1"/>
-                </a:solidFill>
-              </a:rPr>
-              <a:t>直らなければ責任者に連絡</a:t>
-            </a:r>
-            <a:endParaRPr lang="ja-JP" sz="1300" dirty="0"/>
-          </a:p>
-        </p:txBody>
-      </p:sp>
-      <p:sp>
-        <p:nvSpPr>
-          <p:cNvPr id="33" name="Text 25"/>
+              <a:buNone/>
+            </a:pPr>
+            <a:r>
+              <a:rPr lang="ja-JP" altLang="en-US" sz="1150" dirty="0">
+                <a:solidFill>
+                  <a:schemeClr val="tx1"/>
+                </a:solidFill>
+              </a:rPr>
+              <a:t>③ だめなら右上のこのボタンから登録</a:t>
+            </a:r>
+            <a:endParaRPr lang="ja-JP" sz="1150" dirty="0"/>
+          </a:p>
+        </p:txBody>
+      </p:sp>
+      <p:sp>
+        <p:nvSpPr>
+          <p:cNvPr id="26" name="case4"/>
+          <p:cNvSpPr/>
+          <p:nvPr/>
+        </p:nvSpPr>
+        <p:spPr>
+          <a:xfrm>
+            <a:off x="3881628" y="4145280"/>
+            <a:ext cx="3223260" cy="2892552"/>
+          </a:xfrm>
+          <a:prstGeom prst="roundRect">
+            <a:avLst>
+              <a:gd name="adj" fmla="val 3161"/>
+            </a:avLst>
+          </a:prstGeom>
+          <a:solidFill>
+            <a:schemeClr val="bg2"/>
+          </a:solidFill>
+          <a:ln w="12700">
+            <a:solidFill>
+              <a:schemeClr val="bg2"/>
+            </a:solidFill>
+            <a:prstDash val="solid"/>
+          </a:ln>
+        </p:spPr>
+      </p:sp>
+      <p:sp>
+        <p:nvSpPr>
+          <p:cNvPr id="27" name="case4-icon-bg"/>
+          <p:cNvSpPr/>
+          <p:nvPr/>
+        </p:nvSpPr>
+        <p:spPr>
+          <a:xfrm>
+            <a:off x="4046220" y="4291584"/>
+            <a:ext cx="402336" cy="402336"/>
+          </a:xfrm>
+          <a:prstGeom prst="ellipse">
+            <a:avLst/>
+          </a:prstGeom>
+          <a:solidFill>
+            <a:srgbClr val="57534E"/>
+          </a:solidFill>
+          <a:ln w="12700">
+            <a:solidFill>
+              <a:srgbClr val="57534E"/>
+            </a:solidFill>
+            <a:prstDash val="solid"/>
+          </a:ln>
+        </p:spPr>
+      </p:sp>
+      <p:pic>
+        <p:nvPicPr>
+          <p:cNvPr id="28" name="case4-icon" descr="送ったあとに取り消す">    </p:cNvPr>
+          <p:cNvPicPr>
+            <a:picLocks noChangeAspect="1"/>
+          </p:cNvPicPr>
+          <p:nvPr/>
+        </p:nvPicPr>
+        <p:blipFill>
+          <a:blip r:embed="rId7"/>
+          <a:stretch>
+            <a:fillRect/>
+          </a:stretch>
+        </p:blipFill>
+        <p:spPr>
+          <a:xfrm>
+            <a:off x="4119372" y="4364736"/>
+            <a:ext cx="256032" cy="256032"/>
+          </a:xfrm>
+          <a:prstGeom prst="rect">
+            <a:avLst/>
+          </a:prstGeom>
+        </p:spPr>
+      </p:pic>
+      <p:sp>
+        <p:nvSpPr>
+          <p:cNvPr id="29" name="case4-title"/>
           <p:cNvSpPr txBox="1"/>
           <p:nvPr/>
         </p:nvSpPr>
         <p:spPr>
           <a:xfrm>
-            <a:off x="457200" y="7178040"/>
-            <a:ext cx="4572000" cy="228600"/>
+            <a:off x="4558284" y="4291584"/>
+            <a:ext cx="2400300" cy="402336"/>
+          </a:xfrm>
+          <a:prstGeom prst="rect">
+            <a:avLst/>
+          </a:prstGeom>
+          <a:noFill/>
+          <a:ln/>
+        </p:spPr>
+        <p:txBody>
+          <a:bodyPr wrap="square" lIns="0" tIns="0" rIns="0" bIns="0" rtlCol="0" anchor="ctr"/>
+          <a:lstStyle/>
+          <a:p>
+            <a:pPr indent="0" marL="0">
+              <a:buNone/>
+            </a:pPr>
+            <a:r>
+              <a:rPr lang="ja-JP" altLang="en-US" sz="1500" b="1" dirty="0">
+                <a:solidFill>
+                  <a:schemeClr val="tx1"/>
+                </a:solidFill>
+              </a:rPr>
+              <a:t>送ったあとに取り消す</a:t>
+            </a:r>
+            <a:endParaRPr lang="ja-JP" sz="1500" dirty="0"/>
+          </a:p>
+        </p:txBody>
+      </p:sp>
+      <p:sp>
+        <p:nvSpPr>
+          <p:cNvPr id="30" name="case4-screen-frame"/>
+          <p:cNvSpPr/>
+          <p:nvPr/>
+        </p:nvSpPr>
+        <p:spPr>
+          <a:xfrm>
+            <a:off x="4037076" y="5013857"/>
+            <a:ext cx="2912364" cy="448262"/>
+          </a:xfrm>
+          <a:prstGeom prst="rect">
+            <a:avLst/>
+          </a:prstGeom>
+          <a:solidFill>
+            <a:schemeClr val="bg1"/>
+          </a:solidFill>
+          <a:ln w="9525">
+            <a:solidFill>
+              <a:srgbClr val="D6D0CA"/>
+            </a:solidFill>
+            <a:prstDash val="solid"/>
+          </a:ln>
+        </p:spPr>
+      </p:sp>
+      <p:pic>
+        <p:nvPicPr>
+          <p:cNvPr id="31" name="case4-screen" descr="case4-screen">    </p:cNvPr>
+          <p:cNvPicPr>
+            <a:picLocks noChangeAspect="1"/>
+          </p:cNvPicPr>
+          <p:nvPr/>
+        </p:nvPicPr>
+        <p:blipFill>
+          <a:blip r:embed="rId8"/>
+          <a:stretch>
+            <a:fillRect/>
+          </a:stretch>
+        </p:blipFill>
+        <p:spPr>
+          <a:xfrm>
+            <a:off x="4064508" y="5041289"/>
+            <a:ext cx="2857500" cy="393398"/>
+          </a:xfrm>
+          <a:prstGeom prst="rect">
+            <a:avLst/>
+          </a:prstGeom>
+        </p:spPr>
+      </p:pic>
+      <p:sp>
+        <p:nvSpPr>
+          <p:cNvPr id="32" name="case4-caption"/>
+          <p:cNvSpPr txBox="1"/>
+          <p:nvPr/>
+        </p:nvSpPr>
+        <p:spPr>
+          <a:xfrm>
+            <a:off x="4064508" y="5745480"/>
+            <a:ext cx="2857500" cy="201168"/>
+          </a:xfrm>
+          <a:prstGeom prst="rect">
+            <a:avLst/>
+          </a:prstGeom>
+          <a:noFill/>
+          <a:ln/>
+        </p:spPr>
+        <p:txBody>
+          <a:bodyPr wrap="square" lIns="0" tIns="0" rIns="0" bIns="0" rtlCol="0" anchor="ctr"/>
+          <a:lstStyle/>
+          <a:p>
+            <a:pPr algn="ctr" indent="0" marL="0">
+              <a:buNone/>
+            </a:pPr>
+            <a:r>
+              <a:rPr lang="ja-JP" altLang="en-US" sz="950" dirty="0">
+                <a:solidFill>
+                  <a:srgbClr val="57534E"/>
+                </a:solidFill>
+              </a:rPr>
+              <a:t>「過去の注文」の下のボタン</a:t>
+            </a:r>
+            <a:endParaRPr lang="ja-JP" sz="950" dirty="0"/>
+          </a:p>
+        </p:txBody>
+      </p:sp>
+      <p:sp>
+        <p:nvSpPr>
+          <p:cNvPr id="33" name="case4-steps"/>
+          <p:cNvSpPr txBox="1"/>
+          <p:nvPr/>
+        </p:nvSpPr>
+        <p:spPr>
+          <a:xfrm>
+            <a:off x="4064508" y="6019800"/>
+            <a:ext cx="2857500" cy="908304"/>
+          </a:xfrm>
+          <a:prstGeom prst="rect">
+            <a:avLst/>
+          </a:prstGeom>
+          <a:noFill/>
+          <a:ln/>
+        </p:spPr>
+        <p:txBody>
+          <a:bodyPr wrap="square" lIns="0" tIns="0" rIns="0" bIns="0" rtlCol="0" anchor="t"/>
+          <a:lstStyle/>
+          <a:p>
+            <a:pPr indent="0" marL="0">
+              <a:spcAft>
+                <a:spcPts val="400"/>
+              </a:spcAft>
+              <a:buNone/>
+            </a:pPr>
+            <a:r>
+              <a:rPr lang="ja-JP" altLang="en-US" sz="1150" dirty="0">
+                <a:solidFill>
+                  <a:schemeClr val="tx1"/>
+                </a:solidFill>
+              </a:rPr>
+              <a:t>① 「過去の注文」→ 番号で探す</a:t>
+            </a:r>
+            <a:endParaRPr lang="ja-JP" sz="1150" dirty="0"/>
+          </a:p>
+          <a:p>
+            <a:pPr indent="0" marL="0">
+              <a:spcAft>
+                <a:spcPts val="400"/>
+              </a:spcAft>
+              <a:buNone/>
+            </a:pPr>
+            <a:r>
+              <a:rPr lang="ja-JP" altLang="en-US" sz="1150" dirty="0">
+                <a:solidFill>
+                  <a:schemeClr val="tx1"/>
+                </a:solidFill>
+              </a:rPr>
+              <a:t>② 返すなら「返金＆キャンセル」、返さないなら「キャンセル」</a:t>
+            </a:r>
+            <a:endParaRPr lang="ja-JP" sz="1150" dirty="0"/>
+          </a:p>
+          <a:p>
+            <a:pPr indent="0" marL="0">
+              <a:spcAft>
+                <a:spcPts val="400"/>
+              </a:spcAft>
+              <a:buNone/>
+            </a:pPr>
+            <a:r>
+              <a:rPr lang="ja-JP" altLang="en-US" sz="1150" dirty="0">
+                <a:solidFill>
+                  <a:schemeClr val="tx1"/>
+                </a:solidFill>
+              </a:rPr>
+              <a:t>③ 現金は手で返す</a:t>
+            </a:r>
+            <a:endParaRPr lang="ja-JP" sz="1150" dirty="0"/>
+          </a:p>
+        </p:txBody>
+      </p:sp>
+      <p:sp>
+        <p:nvSpPr>
+          <p:cNvPr id="34" name="case5"/>
+          <p:cNvSpPr/>
+          <p:nvPr/>
+        </p:nvSpPr>
+        <p:spPr>
+          <a:xfrm>
+            <a:off x="457200" y="7239000"/>
+            <a:ext cx="3223260" cy="2892552"/>
+          </a:xfrm>
+          <a:prstGeom prst="roundRect">
+            <a:avLst>
+              <a:gd name="adj" fmla="val 3161"/>
+            </a:avLst>
+          </a:prstGeom>
+          <a:solidFill>
+            <a:schemeClr val="bg2"/>
+          </a:solidFill>
+          <a:ln w="12700">
+            <a:solidFill>
+              <a:schemeClr val="bg2"/>
+            </a:solidFill>
+            <a:prstDash val="solid"/>
+          </a:ln>
+        </p:spPr>
+      </p:sp>
+      <p:sp>
+        <p:nvSpPr>
+          <p:cNvPr id="35" name="case5-icon-bg"/>
+          <p:cNvSpPr/>
+          <p:nvPr/>
+        </p:nvSpPr>
+        <p:spPr>
+          <a:xfrm>
+            <a:off x="621792" y="7385304"/>
+            <a:ext cx="402336" cy="402336"/>
+          </a:xfrm>
+          <a:prstGeom prst="ellipse">
+            <a:avLst/>
+          </a:prstGeom>
+          <a:solidFill>
+            <a:schemeClr val="accent2"/>
+          </a:solidFill>
+          <a:ln w="12700">
+            <a:solidFill>
+              <a:schemeClr val="accent2"/>
+            </a:solidFill>
+            <a:prstDash val="solid"/>
+          </a:ln>
+        </p:spPr>
+      </p:sp>
+      <p:pic>
+        <p:nvPicPr>
+          <p:cNvPr id="36" name="case5-icon" descr="オフライン">    </p:cNvPr>
+          <p:cNvPicPr>
+            <a:picLocks noChangeAspect="1"/>
+          </p:cNvPicPr>
+          <p:nvPr/>
+        </p:nvPicPr>
+        <p:blipFill>
+          <a:blip r:embed="rId9"/>
+          <a:stretch>
+            <a:fillRect/>
+          </a:stretch>
+        </p:blipFill>
+        <p:spPr>
+          <a:xfrm>
+            <a:off x="694944" y="7458456"/>
+            <a:ext cx="256032" cy="256032"/>
+          </a:xfrm>
+          <a:prstGeom prst="rect">
+            <a:avLst/>
+          </a:prstGeom>
+        </p:spPr>
+      </p:pic>
+      <p:sp>
+        <p:nvSpPr>
+          <p:cNvPr id="37" name="case5-title"/>
+          <p:cNvSpPr txBox="1"/>
+          <p:nvPr/>
+        </p:nvSpPr>
+        <p:spPr>
+          <a:xfrm>
+            <a:off x="1133856" y="7385304"/>
+            <a:ext cx="2400300" cy="402336"/>
+          </a:xfrm>
+          <a:prstGeom prst="rect">
+            <a:avLst/>
+          </a:prstGeom>
+          <a:noFill/>
+          <a:ln/>
+        </p:spPr>
+        <p:txBody>
+          <a:bodyPr wrap="square" lIns="0" tIns="0" rIns="0" bIns="0" rtlCol="0" anchor="ctr"/>
+          <a:lstStyle/>
+          <a:p>
+            <a:pPr indent="0" marL="0">
+              <a:buNone/>
+            </a:pPr>
+            <a:r>
+              <a:rPr lang="ja-JP" altLang="en-US" sz="1500" b="1" dirty="0">
+                <a:solidFill>
+                  <a:schemeClr val="tx1"/>
+                </a:solidFill>
+              </a:rPr>
+              <a:t>オフライン</a:t>
+            </a:r>
+            <a:endParaRPr lang="ja-JP" sz="1500" dirty="0"/>
+          </a:p>
+        </p:txBody>
+      </p:sp>
+      <p:sp>
+        <p:nvSpPr>
+          <p:cNvPr id="38" name="case5-screen-frame"/>
+          <p:cNvSpPr/>
+          <p:nvPr/>
+        </p:nvSpPr>
+        <p:spPr>
+          <a:xfrm>
+            <a:off x="612648" y="7875651"/>
+            <a:ext cx="2912364" cy="912114"/>
+          </a:xfrm>
+          <a:prstGeom prst="rect">
+            <a:avLst/>
+          </a:prstGeom>
+          <a:solidFill>
+            <a:schemeClr val="bg1"/>
+          </a:solidFill>
+          <a:ln w="9525">
+            <a:solidFill>
+              <a:srgbClr val="D6D0CA"/>
+            </a:solidFill>
+            <a:prstDash val="solid"/>
+          </a:ln>
+        </p:spPr>
+      </p:sp>
+      <p:pic>
+        <p:nvPicPr>
+          <p:cNvPr id="39" name="case5-screen" descr="case5-screen">    </p:cNvPr>
+          <p:cNvPicPr>
+            <a:picLocks noChangeAspect="1"/>
+          </p:cNvPicPr>
+          <p:nvPr/>
+        </p:nvPicPr>
+        <p:blipFill>
+          <a:blip r:embed="rId10"/>
+          <a:stretch>
+            <a:fillRect/>
+          </a:stretch>
+        </p:blipFill>
+        <p:spPr>
+          <a:xfrm>
+            <a:off x="640080" y="7903083"/>
+            <a:ext cx="2857500" cy="857250"/>
+          </a:xfrm>
+          <a:prstGeom prst="rect">
+            <a:avLst/>
+          </a:prstGeom>
+        </p:spPr>
+      </p:pic>
+      <p:sp>
+        <p:nvSpPr>
+          <p:cNvPr id="40" name="case5-caption"/>
+          <p:cNvSpPr txBox="1"/>
+          <p:nvPr/>
+        </p:nvSpPr>
+        <p:spPr>
+          <a:xfrm>
+            <a:off x="640080" y="8839200"/>
+            <a:ext cx="2857500" cy="201168"/>
+          </a:xfrm>
+          <a:prstGeom prst="rect">
+            <a:avLst/>
+          </a:prstGeom>
+          <a:noFill/>
+          <a:ln/>
+        </p:spPr>
+        <p:txBody>
+          <a:bodyPr wrap="square" lIns="0" tIns="0" rIns="0" bIns="0" rtlCol="0" anchor="ctr"/>
+          <a:lstStyle/>
+          <a:p>
+            <a:pPr algn="ctr" indent="0" marL="0">
+              <a:buNone/>
+            </a:pPr>
+            <a:r>
+              <a:rPr lang="ja-JP" altLang="en-US" sz="950" dirty="0">
+                <a:solidFill>
+                  <a:srgbClr val="57534E"/>
+                </a:solidFill>
+              </a:rPr>
+              <a:t>上の帯が赤・番号の横に「オフライン」</a:t>
+            </a:r>
+            <a:endParaRPr lang="ja-JP" sz="950" dirty="0"/>
+          </a:p>
+        </p:txBody>
+      </p:sp>
+      <p:sp>
+        <p:nvSpPr>
+          <p:cNvPr id="41" name="case5-steps"/>
+          <p:cNvSpPr txBox="1"/>
+          <p:nvPr/>
+        </p:nvSpPr>
+        <p:spPr>
+          <a:xfrm>
+            <a:off x="640080" y="9113520"/>
+            <a:ext cx="2857500" cy="908304"/>
+          </a:xfrm>
+          <a:prstGeom prst="rect">
+            <a:avLst/>
+          </a:prstGeom>
+          <a:noFill/>
+          <a:ln/>
+        </p:spPr>
+        <p:txBody>
+          <a:bodyPr wrap="square" lIns="0" tIns="0" rIns="0" bIns="0" rtlCol="0" anchor="t"/>
+          <a:lstStyle/>
+          <a:p>
+            <a:pPr indent="0" marL="0">
+              <a:spcAft>
+                <a:spcPts val="400"/>
+              </a:spcAft>
+              <a:buNone/>
+            </a:pPr>
+            <a:r>
+              <a:rPr lang="ja-JP" altLang="en-US" sz="1150" dirty="0">
+                <a:solidFill>
+                  <a:schemeClr val="tx1"/>
+                </a:solidFill>
+              </a:rPr>
+              <a:t>① 「No.」を押して番号を付ける</a:t>
+            </a:r>
+            <a:endParaRPr lang="ja-JP" sz="1150" dirty="0"/>
+          </a:p>
+          <a:p>
+            <a:pPr indent="0" marL="0">
+              <a:spcAft>
+                <a:spcPts val="400"/>
+              </a:spcAft>
+              <a:buNone/>
+            </a:pPr>
+            <a:r>
+              <a:rPr lang="ja-JP" altLang="en-US" sz="1150" dirty="0">
+                <a:solidFill>
+                  <a:schemeClr val="tx1"/>
+                </a:solidFill>
+              </a:rPr>
+              <a:t>② 現金で確定（Square は使えない）</a:t>
+            </a:r>
+            <a:endParaRPr lang="ja-JP" sz="1150" dirty="0"/>
+          </a:p>
+          <a:p>
+            <a:pPr indent="0" marL="0">
+              <a:spcAft>
+                <a:spcPts val="400"/>
+              </a:spcAft>
+              <a:buNone/>
+            </a:pPr>
+            <a:r>
+              <a:rPr lang="ja-JP" altLang="en-US" sz="1150" dirty="0">
+                <a:solidFill>
+                  <a:schemeClr val="tx1"/>
+                </a:solidFill>
+              </a:rPr>
+              <a:t>③ つながると自動で送られ、番号も自動に戻る</a:t>
+            </a:r>
+            <a:endParaRPr lang="ja-JP" sz="1150" dirty="0"/>
+          </a:p>
+        </p:txBody>
+      </p:sp>
+      <p:sp>
+        <p:nvSpPr>
+          <p:cNvPr id="42" name="case6"/>
+          <p:cNvSpPr/>
+          <p:nvPr/>
+        </p:nvSpPr>
+        <p:spPr>
+          <a:xfrm>
+            <a:off x="3881628" y="7239000"/>
+            <a:ext cx="3223260" cy="2892552"/>
+          </a:xfrm>
+          <a:prstGeom prst="roundRect">
+            <a:avLst>
+              <a:gd name="adj" fmla="val 3161"/>
+            </a:avLst>
+          </a:prstGeom>
+          <a:solidFill>
+            <a:schemeClr val="bg2"/>
+          </a:solidFill>
+          <a:ln w="12700">
+            <a:solidFill>
+              <a:schemeClr val="bg2"/>
+            </a:solidFill>
+            <a:prstDash val="solid"/>
+          </a:ln>
+        </p:spPr>
+      </p:sp>
+      <p:sp>
+        <p:nvSpPr>
+          <p:cNvPr id="43" name="case6-icon-bg"/>
+          <p:cNvSpPr/>
+          <p:nvPr/>
+        </p:nvSpPr>
+        <p:spPr>
+          <a:xfrm>
+            <a:off x="4046220" y="7385304"/>
+            <a:ext cx="402336" cy="402336"/>
+          </a:xfrm>
+          <a:prstGeom prst="ellipse">
+            <a:avLst/>
+          </a:prstGeom>
+          <a:solidFill>
+            <a:schemeClr val="accent4"/>
+          </a:solidFill>
+          <a:ln w="12700">
+            <a:solidFill>
+              <a:schemeClr val="accent4"/>
+            </a:solidFill>
+            <a:prstDash val="solid"/>
+          </a:ln>
+        </p:spPr>
+      </p:sp>
+      <p:pic>
+        <p:nvPicPr>
+          <p:cNvPr id="44" name="case6-icon" descr="印刷されない">    </p:cNvPr>
+          <p:cNvPicPr>
+            <a:picLocks noChangeAspect="1"/>
+          </p:cNvPicPr>
+          <p:nvPr/>
+        </p:nvPicPr>
+        <p:blipFill>
+          <a:blip r:embed="rId11"/>
+          <a:stretch>
+            <a:fillRect/>
+          </a:stretch>
+        </p:blipFill>
+        <p:spPr>
+          <a:xfrm>
+            <a:off x="4119372" y="7458456"/>
+            <a:ext cx="256032" cy="256032"/>
+          </a:xfrm>
+          <a:prstGeom prst="rect">
+            <a:avLst/>
+          </a:prstGeom>
+        </p:spPr>
+      </p:pic>
+      <p:sp>
+        <p:nvSpPr>
+          <p:cNvPr id="45" name="case6-title"/>
+          <p:cNvSpPr txBox="1"/>
+          <p:nvPr/>
+        </p:nvSpPr>
+        <p:spPr>
+          <a:xfrm>
+            <a:off x="4558284" y="7385304"/>
+            <a:ext cx="2400300" cy="402336"/>
+          </a:xfrm>
+          <a:prstGeom prst="rect">
+            <a:avLst/>
+          </a:prstGeom>
+          <a:noFill/>
+          <a:ln/>
+        </p:spPr>
+        <p:txBody>
+          <a:bodyPr wrap="square" lIns="0" tIns="0" rIns="0" bIns="0" rtlCol="0" anchor="ctr"/>
+          <a:lstStyle/>
+          <a:p>
+            <a:pPr indent="0" marL="0">
+              <a:buNone/>
+            </a:pPr>
+            <a:r>
+              <a:rPr lang="ja-JP" altLang="en-US" sz="1500" b="1" dirty="0">
+                <a:solidFill>
+                  <a:schemeClr val="tx1"/>
+                </a:solidFill>
+              </a:rPr>
+              <a:t>印刷されない</a:t>
+            </a:r>
+            <a:endParaRPr lang="ja-JP" sz="1500" dirty="0"/>
+          </a:p>
+        </p:txBody>
+      </p:sp>
+      <p:sp>
+        <p:nvSpPr>
+          <p:cNvPr id="46" name="case6-screen-frame"/>
+          <p:cNvSpPr/>
+          <p:nvPr/>
+        </p:nvSpPr>
+        <p:spPr>
+          <a:xfrm>
+            <a:off x="4037076" y="8119463"/>
+            <a:ext cx="2912364" cy="424491"/>
+          </a:xfrm>
+          <a:prstGeom prst="rect">
+            <a:avLst/>
+          </a:prstGeom>
+          <a:solidFill>
+            <a:schemeClr val="bg1"/>
+          </a:solidFill>
+          <a:ln w="9525">
+            <a:solidFill>
+              <a:srgbClr val="D6D0CA"/>
+            </a:solidFill>
+            <a:prstDash val="solid"/>
+          </a:ln>
+        </p:spPr>
+      </p:sp>
+      <p:pic>
+        <p:nvPicPr>
+          <p:cNvPr id="47" name="case6-screen" descr="case6-screen">    </p:cNvPr>
+          <p:cNvPicPr>
+            <a:picLocks noChangeAspect="1"/>
+          </p:cNvPicPr>
+          <p:nvPr/>
+        </p:nvPicPr>
+        <p:blipFill>
+          <a:blip r:embed="rId12"/>
+          <a:stretch>
+            <a:fillRect/>
+          </a:stretch>
+        </p:blipFill>
+        <p:spPr>
+          <a:xfrm>
+            <a:off x="4064508" y="8146895"/>
+            <a:ext cx="2857500" cy="369627"/>
+          </a:xfrm>
+          <a:prstGeom prst="rect">
+            <a:avLst/>
+          </a:prstGeom>
+        </p:spPr>
+      </p:pic>
+      <p:sp>
+        <p:nvSpPr>
+          <p:cNvPr id="48" name="case6-steps"/>
+          <p:cNvSpPr txBox="1"/>
+          <p:nvPr/>
+        </p:nvSpPr>
+        <p:spPr>
+          <a:xfrm>
+            <a:off x="4064508" y="8930640"/>
+            <a:ext cx="2857500" cy="1091184"/>
+          </a:xfrm>
+          <a:prstGeom prst="rect">
+            <a:avLst/>
+          </a:prstGeom>
+          <a:noFill/>
+          <a:ln/>
+        </p:spPr>
+        <p:txBody>
+          <a:bodyPr wrap="square" lIns="0" tIns="0" rIns="0" bIns="0" rtlCol="0" anchor="t"/>
+          <a:lstStyle/>
+          <a:p>
+            <a:pPr indent="0" marL="0">
+              <a:spcAft>
+                <a:spcPts val="400"/>
+              </a:spcAft>
+              <a:buNone/>
+            </a:pPr>
+            <a:r>
+              <a:rPr lang="ja-JP" altLang="en-US" sz="1150" dirty="0">
+                <a:solidFill>
+                  <a:schemeClr val="tx1"/>
+                </a:solidFill>
+              </a:rPr>
+              <a:t>① 電源・紙・カバーを確かめる</a:t>
+            </a:r>
+            <a:endParaRPr lang="ja-JP" sz="1150" dirty="0"/>
+          </a:p>
+          <a:p>
+            <a:pPr indent="0" marL="0">
+              <a:spcAft>
+                <a:spcPts val="400"/>
+              </a:spcAft>
+              <a:buNone/>
+            </a:pPr>
+            <a:r>
+              <a:rPr lang="ja-JP" altLang="en-US" sz="1150" dirty="0">
+                <a:solidFill>
+                  <a:schemeClr val="tx1"/>
+                </a:solidFill>
+              </a:rPr>
+              <a:t>② 「もう一度刷る」を押す</a:t>
+            </a:r>
+            <a:endParaRPr lang="ja-JP" sz="1150" dirty="0"/>
+          </a:p>
+          <a:p>
+            <a:pPr indent="0" marL="0">
+              <a:spcAft>
+                <a:spcPts val="400"/>
+              </a:spcAft>
+              <a:buNone/>
+            </a:pPr>
+            <a:r>
+              <a:rPr lang="ja-JP" altLang="en-US" sz="1150" dirty="0">
+                <a:solidFill>
+                  <a:schemeClr val="tx1"/>
+                </a:solidFill>
+              </a:rPr>
+              <a:t>③ 直らなければ責任者に連絡</a:t>
+            </a:r>
+            <a:endParaRPr lang="ja-JP" sz="1150" dirty="0"/>
+          </a:p>
+        </p:txBody>
+      </p:sp>
+      <p:sp>
+        <p:nvSpPr>
+          <p:cNvPr id="49" name="Text 35"/>
+          <p:cNvSpPr txBox="1"/>
+          <p:nvPr/>
+        </p:nvSpPr>
+        <p:spPr>
+          <a:xfrm>
+            <a:off x="457200" y="10259568"/>
+            <a:ext cx="3657600" cy="228600"/>
           </a:xfrm>
           <a:prstGeom prst="rect">
             <a:avLst/>
@@ -4533,7 +4995,7 @@
         </p:nvSpPr>
         <p:spPr>
           <a:xfrm>
-            <a:off x="9317736" y="7178040"/>
+            <a:off x="6190488" y="10259568"/>
             <a:ext cx="914400" cy="228600"/>
           </a:xfrm>
           <a:prstGeom prst="rect">
